--- a/第六週(10-15)/第六週_第1節_簡報.pptx
+++ b/第六週(10-15)/第六週_第1節_簡報.pptx
@@ -1292,7 +1292,7 @@
                 <a:ea typeface="Arial Unicode MS"/>
                 <a:cs typeface="Arial Unicode MS"/>
               </a:rPr>
-              <a:t>。第四張講過，頻寬決定距離分得多細：四 GHz，三點七五公分。這是晶片自己就決定的事，所以它敢寫。還有</a:t>
+              <a:t>，就是第四張那條綠線爬了多高。頻寬決定距離分得多細：四 GHz，三點七五公分。這是晶片自己就決定的事，所以它敢寫。還有</a:t>
             </a:r>
             <a:r>
               <a:rPr sz="1200" b="1" lang="zh-TW" dirty="0">
@@ -4020,7 +4020,7 @@
                 <a:ea typeface="Arial Unicode MS"/>
                 <a:cs typeface="Arial Unicode MS"/>
               </a:rPr>
-              <a:t>雷達發出去的不是一個脈衝，是一段</a:t>
+              <a:t>先看座標：橫的是時間，直的是頻率。雷達發出去的不是「嗶」一聲，是一段</a:t>
             </a:r>
             <a:r>
               <a:rPr sz="1200" b="1" lang="zh-TW" dirty="0">
@@ -4042,51 +4042,7 @@
                 <a:ea typeface="Arial Unicode MS"/>
                 <a:cs typeface="Arial Unicode MS"/>
               </a:rPr>
-              <a:t>的訊號，綠色那條線。回波是同一條線往右平移，黃色的，因為它晚了一點回來。同一個時刻去比這兩條線，高度差了一個 </a:t>
-            </a:r>
-            <a:r>
-              <a:rPr sz="1200" b="1" lang="zh-TW" dirty="0">
-                <a:solidFill>
-                  <a:srgbClr val="000000"/>
-                </a:solidFill>
-                <a:latin typeface="Arial Unicode MS"/>
-                <a:ea typeface="Arial Unicode MS"/>
-                <a:cs typeface="Arial Unicode MS"/>
-              </a:rPr>
-              <a:t>Δf</a:t>
-            </a:r>
-            <a:r>
-              <a:rPr sz="1200" lang="zh-TW" dirty="0">
-                <a:solidFill>
-                  <a:srgbClr val="000000"/>
-                </a:solidFill>
-                <a:latin typeface="Arial Unicode MS"/>
-                <a:ea typeface="Arial Unicode MS"/>
-                <a:cs typeface="Arial Unicode MS"/>
-              </a:rPr>
-              <a:t>，就是紅色那一段。回來得愈晚，差愈多。所以</a:t>
-            </a:r>
-            <a:r>
-              <a:rPr sz="1200" b="1" lang="zh-TW" dirty="0">
-                <a:solidFill>
-                  <a:srgbClr val="000000"/>
-                </a:solidFill>
-                <a:latin typeface="Arial Unicode MS"/>
-                <a:ea typeface="Arial Unicode MS"/>
-                <a:cs typeface="Arial Unicode MS"/>
-              </a:rPr>
-              <a:t>頻率差就是距離</a:t>
-            </a:r>
-            <a:r>
-              <a:rPr sz="1200" lang="zh-TW" dirty="0">
-                <a:solidFill>
-                  <a:srgbClr val="000000"/>
-                </a:solidFill>
-                <a:latin typeface="Arial Unicode MS"/>
-                <a:ea typeface="Arial Unicode MS"/>
-                <a:cs typeface="Arial Unicode MS"/>
-              </a:rPr>
-              <a:t>。
+              <a:t>的訊號，就是綠色那條斜線，從 77 GHz 爬到 81 GHz。黃色是回波，同一條線，晚一點回來，所以往右挪。
 </a:t>
             </a:r>
           </a:p>
@@ -4108,7 +4064,7 @@
                 <a:ea typeface="Arial Unicode MS"/>
                 <a:cs typeface="Arial Unicode MS"/>
               </a:rPr>
-              <a:t>這裡順便記一件事，第十一張會用到：頻率爬的範圍叫</a:t>
+              <a:t>想像在山谷裡喊一聲，音調一路往上拉。回音傳回來的時候，你已經喊到更高的音了。你現在喊的音跟聽到的回音，差了一段，就是紅色的 </a:t>
             </a:r>
             <a:r>
               <a:rPr sz="1200" b="1" lang="zh-TW" dirty="0">
@@ -4119,7 +4075,7 @@
                 <a:ea typeface="Arial Unicode MS"/>
                 <a:cs typeface="Arial Unicode MS"/>
               </a:rPr>
-              <a:t>頻寬</a:t>
+              <a:t>Δf</a:t>
             </a:r>
             <a:r>
               <a:rPr sz="1200" lang="zh-TW" dirty="0">
@@ -4130,7 +4086,29 @@
                 <a:ea typeface="Arial Unicode MS"/>
                 <a:cs typeface="Arial Unicode MS"/>
               </a:rPr>
-              <a:t>。頻寬愈寬，距離分得愈細。四 GHz 的頻寬，距離可以分到三點七五公分。
+              <a:t>。山愈遠，回音愈晚，差得愈多。所以</a:t>
+            </a:r>
+            <a:r>
+              <a:rPr sz="1200" b="1" lang="zh-TW" dirty="0">
+                <a:solidFill>
+                  <a:srgbClr val="000000"/>
+                </a:solidFill>
+                <a:latin typeface="Arial Unicode MS"/>
+                <a:ea typeface="Arial Unicode MS"/>
+                <a:cs typeface="Arial Unicode MS"/>
+              </a:rPr>
+              <a:t>頻率差就是距離</a:t>
+            </a:r>
+            <a:r>
+              <a:rPr sz="1200" lang="zh-TW" dirty="0">
+                <a:solidFill>
+                  <a:srgbClr val="000000"/>
+                </a:solidFill>
+                <a:latin typeface="Arial Unicode MS"/>
+                <a:ea typeface="Arial Unicode MS"/>
+                <a:cs typeface="Arial Unicode MS"/>
+              </a:rPr>
+              <a:t>。
 </a:t>
             </a:r>
           </a:p>
@@ -4144,6 +4122,17 @@
               </a:spcAft>
             </a:pPr>
             <a:r>
+              <a:rPr sz="1200" lang="zh-TW" dirty="0">
+                <a:solidFill>
+                  <a:srgbClr val="000000"/>
+                </a:solidFill>
+                <a:latin typeface="Arial Unicode MS"/>
+                <a:ea typeface="Arial Unicode MS"/>
+                <a:cs typeface="Arial Unicode MS"/>
+              </a:rPr>
+              <a:t>綠線從 77 爬到 81，爬了 4 GHz，</a:t>
+            </a:r>
+            <a:r>
               <a:rPr sz="1200" b="1" lang="zh-TW" dirty="0">
                 <a:solidFill>
                   <a:srgbClr val="000000"/>
@@ -4152,7 +4141,7 @@
                 <a:ea typeface="Arial Unicode MS"/>
                 <a:cs typeface="Arial Unicode MS"/>
               </a:rPr>
-              <a:t>第二格，速度。</a:t>
+              <a:t>爬的這段高度叫頻寬</a:t>
             </a:r>
             <a:r>
               <a:rPr sz="1200" lang="zh-TW" dirty="0">
@@ -4163,51 +4152,7 @@
                 <a:ea typeface="Arial Unicode MS"/>
                 <a:cs typeface="Arial Unicode MS"/>
               </a:rPr>
-              <a:t>車子朝你開過來，回波的波被擠密，頻率變高；開走，頻率變低。這叫</a:t>
-            </a:r>
-            <a:r>
-              <a:rPr sz="1200" b="1" lang="zh-TW" dirty="0">
-                <a:solidFill>
-                  <a:srgbClr val="000000"/>
-                </a:solidFill>
-                <a:latin typeface="Arial Unicode MS"/>
-                <a:ea typeface="Arial Unicode MS"/>
-                <a:cs typeface="Arial Unicode MS"/>
-              </a:rPr>
-              <a:t>都卜勒</a:t>
-            </a:r>
-            <a:r>
-              <a:rPr sz="1200" lang="zh-TW" dirty="0">
-                <a:solidFill>
-                  <a:srgbClr val="000000"/>
-                </a:solidFill>
-                <a:latin typeface="Arial Unicode MS"/>
-                <a:ea typeface="Arial Unicode MS"/>
-                <a:cs typeface="Arial Unicode MS"/>
-              </a:rPr>
-              <a:t>，救護車經過的時候聲音變調就是這個。所以雷達</a:t>
-            </a:r>
-            <a:r>
-              <a:rPr sz="1200" b="1" lang="zh-TW" dirty="0">
-                <a:solidFill>
-                  <a:srgbClr val="000000"/>
-                </a:solidFill>
-                <a:latin typeface="Arial Unicode MS"/>
-                <a:ea typeface="Arial Unicode MS"/>
-                <a:cs typeface="Arial Unicode MS"/>
-              </a:rPr>
-              <a:t>一次量測</a:t>
-            </a:r>
-            <a:r>
-              <a:rPr sz="1200" lang="zh-TW" dirty="0">
-                <a:solidFill>
-                  <a:srgbClr val="000000"/>
-                </a:solidFill>
-                <a:latin typeface="Arial Unicode MS"/>
-                <a:ea typeface="Arial Unicode MS"/>
-                <a:cs typeface="Arial Unicode MS"/>
-              </a:rPr>
-              <a:t>就把速度讀出來了，不用等下一張畫面。這一行光達沒有。
+              <a:t>，就是左邊那個 B。頻寬愈寬，距離分得愈細，4 GHz 可以分到三點七五公分。第十一張會再用到。
 </a:t>
             </a:r>
           </a:p>
@@ -4229,7 +4174,7 @@
                 <a:ea typeface="Arial Unicode MS"/>
                 <a:cs typeface="Arial Unicode MS"/>
               </a:rPr>
-              <a:t>第三格，角度。</a:t>
+              <a:t>第二格，速度。</a:t>
             </a:r>
             <a:r>
               <a:rPr sz="1200" lang="zh-TW" dirty="0">
@@ -4240,7 +4185,7 @@
                 <a:ea typeface="Arial Unicode MS"/>
                 <a:cs typeface="Arial Unicode MS"/>
               </a:rPr>
-              <a:t>雷達不會轉，也沒有鏡頭。它靠</a:t>
+              <a:t>車子朝你開過來，回波被擠密，頻率變高；開走，頻率變低。這叫</a:t>
             </a:r>
             <a:r>
               <a:rPr sz="1200" b="1" lang="zh-TW" dirty="0">
@@ -4251,7 +4196,7 @@
                 <a:ea typeface="Arial Unicode MS"/>
                 <a:cs typeface="Arial Unicode MS"/>
               </a:rPr>
-              <a:t>好幾根天線</a:t>
+              <a:t>都卜勒</a:t>
             </a:r>
             <a:r>
               <a:rPr sz="1200" lang="zh-TW" dirty="0">
@@ -4262,7 +4207,29 @@
                 <a:ea typeface="Arial Unicode MS"/>
                 <a:cs typeface="Arial Unicode MS"/>
               </a:rPr>
-              <a:t>：波斜斜打過來，右邊那根先碰到，左邊那根晚一點，差了一點點相位，反推回去就是角度。天線愈多，角度分得愈細。
+              <a:t>，救護車經過聲音變調就是這個。所以雷達</a:t>
+            </a:r>
+            <a:r>
+              <a:rPr sz="1200" b="1" lang="zh-TW" dirty="0">
+                <a:solidFill>
+                  <a:srgbClr val="000000"/>
+                </a:solidFill>
+                <a:latin typeface="Arial Unicode MS"/>
+                <a:ea typeface="Arial Unicode MS"/>
+                <a:cs typeface="Arial Unicode MS"/>
+              </a:rPr>
+              <a:t>一次量測</a:t>
+            </a:r>
+            <a:r>
+              <a:rPr sz="1200" lang="zh-TW" dirty="0">
+                <a:solidFill>
+                  <a:srgbClr val="000000"/>
+                </a:solidFill>
+                <a:latin typeface="Arial Unicode MS"/>
+                <a:ea typeface="Arial Unicode MS"/>
+                <a:cs typeface="Arial Unicode MS"/>
+              </a:rPr>
+              <a:t>就讀出速度，這一行光達沒有。
 </a:t>
             </a:r>
           </a:p>
@@ -4276,6 +4243,17 @@
               </a:spcAft>
             </a:pPr>
             <a:r>
+              <a:rPr sz="1200" b="1" lang="zh-TW" dirty="0">
+                <a:solidFill>
+                  <a:srgbClr val="000000"/>
+                </a:solidFill>
+                <a:latin typeface="Arial Unicode MS"/>
+                <a:ea typeface="Arial Unicode MS"/>
+                <a:cs typeface="Arial Unicode MS"/>
+              </a:rPr>
+              <a:t>第三格，角度。</a:t>
+            </a:r>
+            <a:r>
               <a:rPr sz="1200" lang="zh-TW" dirty="0">
                 <a:solidFill>
                   <a:srgbClr val="000000"/>
@@ -4284,7 +4262,51 @@
                 <a:ea typeface="Arial Unicode MS"/>
                 <a:cs typeface="Arial Unicode MS"/>
               </a:rPr>
-              <a:t>三件事，三行。等一下讀表的時候，各位就一行一行找這三行。</a:t>
+              <a:t>雷達靠</a:t>
+            </a:r>
+            <a:r>
+              <a:rPr sz="1200" b="1" lang="zh-TW" dirty="0">
+                <a:solidFill>
+                  <a:srgbClr val="000000"/>
+                </a:solidFill>
+                <a:latin typeface="Arial Unicode MS"/>
+                <a:ea typeface="Arial Unicode MS"/>
+                <a:cs typeface="Arial Unicode MS"/>
+              </a:rPr>
+              <a:t>好幾根天線</a:t>
+            </a:r>
+            <a:r>
+              <a:rPr sz="1200" lang="zh-TW" dirty="0">
+                <a:solidFill>
+                  <a:srgbClr val="000000"/>
+                </a:solidFill>
+                <a:latin typeface="Arial Unicode MS"/>
+                <a:ea typeface="Arial Unicode MS"/>
+                <a:cs typeface="Arial Unicode MS"/>
+              </a:rPr>
+              <a:t>：波斜斜打過來，右邊那根先碰到，左邊晚一點，差一點點相位，反推回去就是角度。天線愈多，角度分得愈細。
+</a:t>
+            </a:r>
+          </a:p>
+          <a:p>
+            <a:pPr algn="l">
+              <a:spcBef>
+                <a:spcPts val="0"/>
+              </a:spcBef>
+              <a:spcAft>
+                <a:spcPts val="200"/>
+              </a:spcAft>
+            </a:pPr>
+            <a:r>
+              <a:rPr sz="1200" lang="zh-TW" dirty="0">
+                <a:solidFill>
+                  <a:srgbClr val="000000"/>
+                </a:solidFill>
+                <a:latin typeface="Arial Unicode MS"/>
+                <a:ea typeface="Arial Unicode MS"/>
+                <a:cs typeface="Arial Unicode MS"/>
+              </a:rPr>
+              <a:t>三件事，三行。等一下讀表，各位就一行一行找這三行。</a:t>
             </a:r>
           </a:p>
         </p:txBody>

--- a/第六週(10-15)/第六週_第1節_簡報.pptx
+++ b/第六週(10-15)/第六週_第1節_簡報.pptx
@@ -3975,11 +3975,11 @@
                 <a:spcPts val="0"/>
               </a:spcBef>
               <a:spcAft>
-                <a:spcPts val="200"/>
+                <a:spcPts val="142"/>
               </a:spcAft>
             </a:pPr>
             <a:r>
-              <a:rPr sz="1200" lang="zh-TW" dirty="0">
+              <a:rPr sz="850" lang="zh-TW" dirty="0">
                 <a:solidFill>
                   <a:srgbClr val="000000"/>
                 </a:solidFill>
@@ -3997,11 +3997,11 @@
                 <a:spcPts val="0"/>
               </a:spcBef>
               <a:spcAft>
-                <a:spcPts val="200"/>
+                <a:spcPts val="142"/>
               </a:spcAft>
             </a:pPr>
             <a:r>
-              <a:rPr sz="1200" b="1" lang="zh-TW" dirty="0">
+              <a:rPr sz="850" b="1" lang="zh-TW" dirty="0">
                 <a:solidFill>
                   <a:srgbClr val="000000"/>
                 </a:solidFill>
@@ -4012,37 +4012,15 @@
               <a:t>第一格，距離。</a:t>
             </a:r>
             <a:r>
-              <a:rPr sz="1200" lang="zh-TW" dirty="0">
-                <a:solidFill>
-                  <a:srgbClr val="000000"/>
-                </a:solidFill>
-                <a:latin typeface="Arial Unicode MS"/>
-                <a:ea typeface="Arial Unicode MS"/>
-                <a:cs typeface="Arial Unicode MS"/>
-              </a:rPr>
-              <a:t>先看座標：橫的是時間，直的是頻率。雷達發出去的不是「嗶」一聲，是一段</a:t>
-            </a:r>
-            <a:r>
-              <a:rPr sz="1200" b="1" lang="zh-TW" dirty="0">
-                <a:solidFill>
-                  <a:srgbClr val="000000"/>
-                </a:solidFill>
-                <a:latin typeface="Arial Unicode MS"/>
-                <a:ea typeface="Arial Unicode MS"/>
-                <a:cs typeface="Arial Unicode MS"/>
-              </a:rPr>
-              <a:t>頻率一直往上爬</a:t>
-            </a:r>
-            <a:r>
-              <a:rPr sz="1200" lang="zh-TW" dirty="0">
-                <a:solidFill>
-                  <a:srgbClr val="000000"/>
-                </a:solidFill>
-                <a:latin typeface="Arial Unicode MS"/>
-                <a:ea typeface="Arial Unicode MS"/>
-                <a:cs typeface="Arial Unicode MS"/>
-              </a:rPr>
-              <a:t>的訊號，就是綠色那條斜線，從 77 GHz 爬到 81 GHz。黃色是回波，同一條線，晚一點回來，所以往右挪。
+              <a:rPr sz="850" lang="zh-TW" dirty="0">
+                <a:solidFill>
+                  <a:srgbClr val="000000"/>
+                </a:solidFill>
+                <a:latin typeface="Arial Unicode MS"/>
+                <a:ea typeface="Arial Unicode MS"/>
+                <a:cs typeface="Arial Unicode MS"/>
+              </a:rPr>
+              <a:t>先看座標：橫的是時間，直的是頻率，不是訊號的強弱。
 </a:t>
             </a:r>
           </a:p>
@@ -4052,63 +4030,63 @@
                 <a:spcPts val="0"/>
               </a:spcBef>
               <a:spcAft>
-                <a:spcPts val="200"/>
+                <a:spcPts val="142"/>
               </a:spcAft>
             </a:pPr>
             <a:r>
-              <a:rPr sz="1200" lang="zh-TW" dirty="0">
-                <a:solidFill>
-                  <a:srgbClr val="000000"/>
-                </a:solidFill>
-                <a:latin typeface="Arial Unicode MS"/>
-                <a:ea typeface="Arial Unicode MS"/>
-                <a:cs typeface="Arial Unicode MS"/>
-              </a:rPr>
-              <a:t>想像在山谷裡喊一聲，音調一路往上拉。回音傳回來的時候，你已經喊到更高的音了。你現在喊的音跟聽到的回音，差了一段，就是紅色的 </a:t>
-            </a:r>
-            <a:r>
-              <a:rPr sz="1200" b="1" lang="zh-TW" dirty="0">
-                <a:solidFill>
-                  <a:srgbClr val="000000"/>
-                </a:solidFill>
-                <a:latin typeface="Arial Unicode MS"/>
-                <a:ea typeface="Arial Unicode MS"/>
-                <a:cs typeface="Arial Unicode MS"/>
-              </a:rPr>
-              <a:t>Δf</a:t>
-            </a:r>
-            <a:r>
-              <a:rPr sz="1200" lang="zh-TW" dirty="0">
-                <a:solidFill>
-                  <a:srgbClr val="000000"/>
-                </a:solidFill>
-                <a:latin typeface="Arial Unicode MS"/>
-                <a:ea typeface="Arial Unicode MS"/>
-                <a:cs typeface="Arial Unicode MS"/>
-              </a:rPr>
-              <a:t>。山愈遠，回音愈晚，差得愈多。所以</a:t>
-            </a:r>
-            <a:r>
-              <a:rPr sz="1200" b="1" lang="zh-TW" dirty="0">
-                <a:solidFill>
-                  <a:srgbClr val="000000"/>
-                </a:solidFill>
-                <a:latin typeface="Arial Unicode MS"/>
-                <a:ea typeface="Arial Unicode MS"/>
-                <a:cs typeface="Arial Unicode MS"/>
-              </a:rPr>
-              <a:t>頻率差就是距離</a:t>
-            </a:r>
-            <a:r>
-              <a:rPr sz="1200" lang="zh-TW" dirty="0">
-                <a:solidFill>
-                  <a:srgbClr val="000000"/>
-                </a:solidFill>
-                <a:latin typeface="Arial Unicode MS"/>
-                <a:ea typeface="Arial Unicode MS"/>
-                <a:cs typeface="Arial Unicode MS"/>
-              </a:rPr>
-              <a:t>。
+              <a:rPr sz="850" lang="zh-TW" dirty="0">
+                <a:solidFill>
+                  <a:srgbClr val="000000"/>
+                </a:solidFill>
+                <a:latin typeface="Arial Unicode MS"/>
+                <a:ea typeface="Arial Unicode MS"/>
+                <a:cs typeface="Arial Unicode MS"/>
+              </a:rPr>
+              <a:t>光達的做法是「嗶」一聲打出去，等回音，用碼錶算過了多久。汽車雷達不這樣做。它發出去的是一段</a:t>
+            </a:r>
+            <a:r>
+              <a:rPr sz="850" b="1" lang="zh-TW" dirty="0">
+                <a:solidFill>
+                  <a:srgbClr val="000000"/>
+                </a:solidFill>
+                <a:latin typeface="Arial Unicode MS"/>
+                <a:ea typeface="Arial Unicode MS"/>
+                <a:cs typeface="Arial Unicode MS"/>
+              </a:rPr>
+              <a:t>頻率一直往上爬</a:t>
+            </a:r>
+            <a:r>
+              <a:rPr sz="850" lang="zh-TW" dirty="0">
+                <a:solidFill>
+                  <a:srgbClr val="000000"/>
+                </a:solidFill>
+                <a:latin typeface="Arial Unicode MS"/>
+                <a:ea typeface="Arial Unicode MS"/>
+                <a:cs typeface="Arial Unicode MS"/>
+              </a:rPr>
+              <a:t>的訊號，從 77 GHz 平平順順升到 81 GHz，只花幾十微秒。畫在圖上，就是往右上斜的綠線。這一段英文叫 </a:t>
+            </a:r>
+            <a:r>
+              <a:rPr sz="850" b="1" lang="zh-TW" dirty="0">
+                <a:solidFill>
+                  <a:srgbClr val="000000"/>
+                </a:solidFill>
+                <a:latin typeface="Arial Unicode MS"/>
+                <a:ea typeface="Arial Unicode MS"/>
+                <a:cs typeface="Arial Unicode MS"/>
+              </a:rPr>
+              <a:t>chirp</a:t>
+            </a:r>
+            <a:r>
+              <a:rPr sz="850" lang="zh-TW" dirty="0">
+                <a:solidFill>
+                  <a:srgbClr val="000000"/>
+                </a:solidFill>
+                <a:latin typeface="Arial Unicode MS"/>
+                <a:ea typeface="Arial Unicode MS"/>
+                <a:cs typeface="Arial Unicode MS"/>
+              </a:rPr>
+              <a:t>，就是小鳥叫的時候往上揚的那種聲音。
 </a:t>
             </a:r>
           </a:p>
@@ -4118,41 +4096,63 @@
                 <a:spcPts val="0"/>
               </a:spcBef>
               <a:spcAft>
-                <a:spcPts val="200"/>
+                <a:spcPts val="142"/>
               </a:spcAft>
             </a:pPr>
             <a:r>
-              <a:rPr sz="1200" lang="zh-TW" dirty="0">
-                <a:solidFill>
-                  <a:srgbClr val="000000"/>
-                </a:solidFill>
-                <a:latin typeface="Arial Unicode MS"/>
-                <a:ea typeface="Arial Unicode MS"/>
-                <a:cs typeface="Arial Unicode MS"/>
-              </a:rPr>
-              <a:t>綠線從 77 爬到 81，爬了 4 GHz，</a:t>
-            </a:r>
-            <a:r>
-              <a:rPr sz="1200" b="1" lang="zh-TW" dirty="0">
-                <a:solidFill>
-                  <a:srgbClr val="000000"/>
-                </a:solidFill>
-                <a:latin typeface="Arial Unicode MS"/>
-                <a:ea typeface="Arial Unicode MS"/>
-                <a:cs typeface="Arial Unicode MS"/>
-              </a:rPr>
-              <a:t>爬的這段高度叫頻寬</a:t>
-            </a:r>
-            <a:r>
-              <a:rPr sz="1200" lang="zh-TW" dirty="0">
-                <a:solidFill>
-                  <a:srgbClr val="000000"/>
-                </a:solidFill>
-                <a:latin typeface="Arial Unicode MS"/>
-                <a:ea typeface="Arial Unicode MS"/>
-                <a:cs typeface="Arial Unicode MS"/>
-              </a:rPr>
-              <a:t>，就是左邊那個 B。頻寬愈寬，距離分得愈細，4 GHz 可以分到三點七五公分。第十一張會再用到。
+              <a:rPr sz="850" lang="zh-TW" dirty="0">
+                <a:solidFill>
+                  <a:srgbClr val="000000"/>
+                </a:solidFill>
+                <a:latin typeface="Arial Unicode MS"/>
+                <a:ea typeface="Arial Unicode MS"/>
+                <a:cs typeface="Arial Unicode MS"/>
+              </a:rPr>
+              <a:t>為什麼要往上爬？想像在山谷裡喊一聲，音調一路往上拉。回音傳回來的時候，你已經喊到更高的音了。你現在喊的音，跟聽到的回音，中間差了一段，就是紅色的 </a:t>
+            </a:r>
+            <a:r>
+              <a:rPr sz="850" b="1" lang="zh-TW" dirty="0">
+                <a:solidFill>
+                  <a:srgbClr val="000000"/>
+                </a:solidFill>
+                <a:latin typeface="Arial Unicode MS"/>
+                <a:ea typeface="Arial Unicode MS"/>
+                <a:cs typeface="Arial Unicode MS"/>
+              </a:rPr>
+              <a:t>Δf</a:t>
+            </a:r>
+            <a:r>
+              <a:rPr sz="850" lang="zh-TW" dirty="0">
+                <a:solidFill>
+                  <a:srgbClr val="000000"/>
+                </a:solidFill>
+                <a:latin typeface="Arial Unicode MS"/>
+                <a:ea typeface="Arial Unicode MS"/>
+                <a:cs typeface="Arial Unicode MS"/>
+              </a:rPr>
+              <a:t>。山愈遠，回音愈晚回來，你喊得愈高，差得就愈多。所以</a:t>
+            </a:r>
+            <a:r>
+              <a:rPr sz="850" b="1" lang="zh-TW" dirty="0">
+                <a:solidFill>
+                  <a:srgbClr val="000000"/>
+                </a:solidFill>
+                <a:latin typeface="Arial Unicode MS"/>
+                <a:ea typeface="Arial Unicode MS"/>
+                <a:cs typeface="Arial Unicode MS"/>
+              </a:rPr>
+              <a:t>頻率差就是距離</a:t>
+            </a:r>
+            <a:r>
+              <a:rPr sz="850" lang="zh-TW" dirty="0">
+                <a:solidFill>
+                  <a:srgbClr val="000000"/>
+                </a:solidFill>
+                <a:latin typeface="Arial Unicode MS"/>
+                <a:ea typeface="Arial Unicode MS"/>
+                <a:cs typeface="Arial Unicode MS"/>
+              </a:rPr>
+              <a:t>。
 </a:t>
             </a:r>
           </a:p>
@@ -4162,74 +4162,19 @@
                 <a:spcPts val="0"/>
               </a:spcBef>
               <a:spcAft>
-                <a:spcPts val="200"/>
+                <a:spcPts val="142"/>
               </a:spcAft>
             </a:pPr>
             <a:r>
-              <a:rPr sz="1200" b="1" lang="zh-TW" dirty="0">
-                <a:solidFill>
-                  <a:srgbClr val="000000"/>
-                </a:solidFill>
-                <a:latin typeface="Arial Unicode MS"/>
-                <a:ea typeface="Arial Unicode MS"/>
-                <a:cs typeface="Arial Unicode MS"/>
-              </a:rPr>
-              <a:t>第二格，速度。</a:t>
-            </a:r>
-            <a:r>
-              <a:rPr sz="1200" lang="zh-TW" dirty="0">
-                <a:solidFill>
-                  <a:srgbClr val="000000"/>
-                </a:solidFill>
-                <a:latin typeface="Arial Unicode MS"/>
-                <a:ea typeface="Arial Unicode MS"/>
-                <a:cs typeface="Arial Unicode MS"/>
-              </a:rPr>
-              <a:t>車子朝你開過來，回波被擠密，頻率變高；開走，頻率變低。這叫</a:t>
-            </a:r>
-            <a:r>
-              <a:rPr sz="1200" b="1" lang="zh-TW" dirty="0">
-                <a:solidFill>
-                  <a:srgbClr val="000000"/>
-                </a:solidFill>
-                <a:latin typeface="Arial Unicode MS"/>
-                <a:ea typeface="Arial Unicode MS"/>
-                <a:cs typeface="Arial Unicode MS"/>
-              </a:rPr>
-              <a:t>都卜勒</a:t>
-            </a:r>
-            <a:r>
-              <a:rPr sz="1200" lang="zh-TW" dirty="0">
-                <a:solidFill>
-                  <a:srgbClr val="000000"/>
-                </a:solidFill>
-                <a:latin typeface="Arial Unicode MS"/>
-                <a:ea typeface="Arial Unicode MS"/>
-                <a:cs typeface="Arial Unicode MS"/>
-              </a:rPr>
-              <a:t>，救護車經過聲音變調就是這個。所以雷達</a:t>
-            </a:r>
-            <a:r>
-              <a:rPr sz="1200" b="1" lang="zh-TW" dirty="0">
-                <a:solidFill>
-                  <a:srgbClr val="000000"/>
-                </a:solidFill>
-                <a:latin typeface="Arial Unicode MS"/>
-                <a:ea typeface="Arial Unicode MS"/>
-                <a:cs typeface="Arial Unicode MS"/>
-              </a:rPr>
-              <a:t>一次量測</a:t>
-            </a:r>
-            <a:r>
-              <a:rPr sz="1200" lang="zh-TW" dirty="0">
-                <a:solidFill>
-                  <a:srgbClr val="000000"/>
-                </a:solidFill>
-                <a:latin typeface="Arial Unicode MS"/>
-                <a:ea typeface="Arial Unicode MS"/>
-                <a:cs typeface="Arial Unicode MS"/>
-              </a:rPr>
-              <a:t>就讀出速度，這一行光達沒有。
+              <a:rPr sz="850" lang="zh-TW" dirty="0">
+                <a:solidFill>
+                  <a:srgbClr val="000000"/>
+                </a:solidFill>
+                <a:latin typeface="Arial Unicode MS"/>
+                <a:ea typeface="Arial Unicode MS"/>
+                <a:cs typeface="Arial Unicode MS"/>
+              </a:rPr>
+              <a:t>黃色那條是回波。它就是同一段訊號，晚了一點才回來，所以形狀一樣，只是往右挪。
 </a:t>
             </a:r>
           </a:p>
@@ -4239,52 +4184,19 @@
                 <a:spcPts val="0"/>
               </a:spcBef>
               <a:spcAft>
-                <a:spcPts val="200"/>
+                <a:spcPts val="142"/>
               </a:spcAft>
             </a:pPr>
             <a:r>
-              <a:rPr sz="1200" b="1" lang="zh-TW" dirty="0">
-                <a:solidFill>
-                  <a:srgbClr val="000000"/>
-                </a:solidFill>
-                <a:latin typeface="Arial Unicode MS"/>
-                <a:ea typeface="Arial Unicode MS"/>
-                <a:cs typeface="Arial Unicode MS"/>
-              </a:rPr>
-              <a:t>第三格，角度。</a:t>
-            </a:r>
-            <a:r>
-              <a:rPr sz="1200" lang="zh-TW" dirty="0">
-                <a:solidFill>
-                  <a:srgbClr val="000000"/>
-                </a:solidFill>
-                <a:latin typeface="Arial Unicode MS"/>
-                <a:ea typeface="Arial Unicode MS"/>
-                <a:cs typeface="Arial Unicode MS"/>
-              </a:rPr>
-              <a:t>雷達靠</a:t>
-            </a:r>
-            <a:r>
-              <a:rPr sz="1200" b="1" lang="zh-TW" dirty="0">
-                <a:solidFill>
-                  <a:srgbClr val="000000"/>
-                </a:solidFill>
-                <a:latin typeface="Arial Unicode MS"/>
-                <a:ea typeface="Arial Unicode MS"/>
-                <a:cs typeface="Arial Unicode MS"/>
-              </a:rPr>
-              <a:t>好幾根天線</a:t>
-            </a:r>
-            <a:r>
-              <a:rPr sz="1200" lang="zh-TW" dirty="0">
-                <a:solidFill>
-                  <a:srgbClr val="000000"/>
-                </a:solidFill>
-                <a:latin typeface="Arial Unicode MS"/>
-                <a:ea typeface="Arial Unicode MS"/>
-                <a:cs typeface="Arial Unicode MS"/>
-              </a:rPr>
-              <a:t>：波斜斜打過來，右邊那根先碰到，左邊晚一點，差一點點相位，反推回去就是角度。天線愈多，角度分得愈細。
+              <a:rPr sz="850" lang="zh-TW" dirty="0">
+                <a:solidFill>
+                  <a:srgbClr val="000000"/>
+                </a:solidFill>
+                <a:latin typeface="Arial Unicode MS"/>
+                <a:ea typeface="Arial Unicode MS"/>
+                <a:cs typeface="Arial Unicode MS"/>
+              </a:rPr>
+              <a:t>為什麼不直接用碼錶？因為電波太快了。一公尺來回只要六點七奈秒，便宜的晶片很難量這麼短的時間。換成頻率差就好量了。舉個好算的數字：四十微秒爬 4 GHz 的話，十五公尺外的東西，頻率差大約 10 MHz，一般的電路就量得到。
 </a:t>
             </a:r>
           </a:p>
@@ -4294,11 +4206,286 @@
                 <a:spcPts val="0"/>
               </a:spcBef>
               <a:spcAft>
-                <a:spcPts val="200"/>
+                <a:spcPts val="142"/>
               </a:spcAft>
             </a:pPr>
             <a:r>
-              <a:rPr sz="1200" lang="zh-TW" dirty="0">
+              <a:rPr sz="850" b="1" lang="zh-TW" dirty="0">
+                <a:solidFill>
+                  <a:srgbClr val="000000"/>
+                </a:solidFill>
+                <a:latin typeface="Arial Unicode MS"/>
+                <a:ea typeface="Arial Unicode MS"/>
+                <a:cs typeface="Arial Unicode MS"/>
+              </a:rPr>
+              <a:t>再來是頻寬。</a:t>
+            </a:r>
+            <a:r>
+              <a:rPr sz="850" lang="zh-TW" dirty="0">
+                <a:solidFill>
+                  <a:srgbClr val="000000"/>
+                </a:solidFill>
+                <a:latin typeface="Arial Unicode MS"/>
+                <a:ea typeface="Arial Unicode MS"/>
+                <a:cs typeface="Arial Unicode MS"/>
+              </a:rPr>
+              <a:t>這裡的頻寬不是網路的頻寬，意思是頻率的寬度，也就是綠線</a:t>
+            </a:r>
+            <a:r>
+              <a:rPr sz="850" b="1" lang="zh-TW" dirty="0">
+                <a:solidFill>
+                  <a:srgbClr val="000000"/>
+                </a:solidFill>
+                <a:latin typeface="Arial Unicode MS"/>
+                <a:ea typeface="Arial Unicode MS"/>
+                <a:cs typeface="Arial Unicode MS"/>
+              </a:rPr>
+              <a:t>從最低爬到最高，總共爬了多高</a:t>
+            </a:r>
+            <a:r>
+              <a:rPr sz="850" lang="zh-TW" dirty="0">
+                <a:solidFill>
+                  <a:srgbClr val="000000"/>
+                </a:solidFill>
+                <a:latin typeface="Arial Unicode MS"/>
+                <a:ea typeface="Arial Unicode MS"/>
+                <a:cs typeface="Arial Unicode MS"/>
+              </a:rPr>
+              <a:t>。從 77 爬到 81，就是 4 GHz，左邊那個 B。
+</a:t>
+            </a:r>
+          </a:p>
+          <a:p>
+            <a:pPr algn="l">
+              <a:spcBef>
+                <a:spcPts val="0"/>
+              </a:spcBef>
+              <a:spcAft>
+                <a:spcPts val="142"/>
+              </a:spcAft>
+            </a:pPr>
+            <a:r>
+              <a:rPr sz="850" lang="zh-TW" dirty="0">
+                <a:solidFill>
+                  <a:srgbClr val="000000"/>
+                </a:solidFill>
+                <a:latin typeface="Arial Unicode MS"/>
+                <a:ea typeface="Arial Unicode MS"/>
+                <a:cs typeface="Arial Unicode MS"/>
+              </a:rPr>
+              <a:t>頻寬愈寬，距離分得愈細。假設前面有兩個東西，一個在二十公尺，一個在二十點一公尺。兩個回波各有一個 Δf，兩個數字非常接近。要把兩個很接近的頻率分開，得聽夠久。算出來的結果是：能分開的最小距離，</a:t>
+            </a:r>
+            <a:r>
+              <a:rPr sz="850" b="1" lang="zh-TW" dirty="0">
+                <a:solidFill>
+                  <a:srgbClr val="000000"/>
+                </a:solidFill>
+                <a:latin typeface="Arial Unicode MS"/>
+                <a:ea typeface="Arial Unicode MS"/>
+                <a:cs typeface="Arial Unicode MS"/>
+              </a:rPr>
+              <a:t>只看綠線爬了多高</a:t>
+            </a:r>
+            <a:r>
+              <a:rPr sz="850" lang="zh-TW" dirty="0">
+                <a:solidFill>
+                  <a:srgbClr val="000000"/>
+                </a:solidFill>
+                <a:latin typeface="Arial Unicode MS"/>
+                <a:ea typeface="Arial Unicode MS"/>
+                <a:cs typeface="Arial Unicode MS"/>
+              </a:rPr>
+              <a:t>，跟爬得快還是慢沒有關係。
+</a:t>
+            </a:r>
+          </a:p>
+          <a:p>
+            <a:pPr algn="l">
+              <a:spcBef>
+                <a:spcPts val="0"/>
+              </a:spcBef>
+              <a:spcAft>
+                <a:spcPts val="142"/>
+              </a:spcAft>
+            </a:pPr>
+            <a:r>
+              <a:rPr sz="850" lang="zh-TW" dirty="0">
+                <a:solidFill>
+                  <a:srgbClr val="000000"/>
+                </a:solidFill>
+                <a:latin typeface="Arial Unicode MS"/>
+                <a:ea typeface="Arial Unicode MS"/>
+                <a:cs typeface="Arial Unicode MS"/>
+              </a:rPr>
+              <a:t>公式是光速除以兩倍的頻寬。光速每秒三億公尺，除以八十億，就是</a:t>
+            </a:r>
+            <a:r>
+              <a:rPr sz="850" b="1" lang="zh-TW" dirty="0">
+                <a:solidFill>
+                  <a:srgbClr val="000000"/>
+                </a:solidFill>
+                <a:latin typeface="Arial Unicode MS"/>
+                <a:ea typeface="Arial Unicode MS"/>
+                <a:cs typeface="Arial Unicode MS"/>
+              </a:rPr>
+              <a:t>三點七五公分</a:t>
+            </a:r>
+            <a:r>
+              <a:rPr sz="850" lang="zh-TW" dirty="0">
+                <a:solidFill>
+                  <a:srgbClr val="000000"/>
+                </a:solidFill>
+                <a:latin typeface="Arial Unicode MS"/>
+                <a:ea typeface="Arial Unicode MS"/>
+                <a:cs typeface="Arial Unicode MS"/>
+              </a:rPr>
+              <a:t>。所以 4 GHz 分得開這兩個東西。如果只爬 1 GHz，只能分到十五公分，這兩個東西就會被看成同一個。第十一張那顆 TI 晶片的規格表，就只寫得出頻寬，到時候再看。
+</a:t>
+            </a:r>
+          </a:p>
+          <a:p>
+            <a:pPr algn="l">
+              <a:spcBef>
+                <a:spcPts val="0"/>
+              </a:spcBef>
+              <a:spcAft>
+                <a:spcPts val="142"/>
+              </a:spcAft>
+            </a:pPr>
+            <a:r>
+              <a:rPr sz="850" b="1" lang="zh-TW" dirty="0">
+                <a:solidFill>
+                  <a:srgbClr val="000000"/>
+                </a:solidFill>
+                <a:latin typeface="Arial Unicode MS"/>
+                <a:ea typeface="Arial Unicode MS"/>
+                <a:cs typeface="Arial Unicode MS"/>
+              </a:rPr>
+              <a:t>第二格，速度。</a:t>
+            </a:r>
+            <a:r>
+              <a:rPr sz="850" lang="zh-TW" dirty="0">
+                <a:solidFill>
+                  <a:srgbClr val="000000"/>
+                </a:solidFill>
+                <a:latin typeface="Arial Unicode MS"/>
+                <a:ea typeface="Arial Unicode MS"/>
+                <a:cs typeface="Arial Unicode MS"/>
+              </a:rPr>
+              <a:t>車子朝你開過來，回波被擠密，頻率變高；開走，頻率變低。這叫</a:t>
+            </a:r>
+            <a:r>
+              <a:rPr sz="850" b="1" lang="zh-TW" dirty="0">
+                <a:solidFill>
+                  <a:srgbClr val="000000"/>
+                </a:solidFill>
+                <a:latin typeface="Arial Unicode MS"/>
+                <a:ea typeface="Arial Unicode MS"/>
+                <a:cs typeface="Arial Unicode MS"/>
+              </a:rPr>
+              <a:t>都卜勒</a:t>
+            </a:r>
+            <a:r>
+              <a:rPr sz="850" lang="zh-TW" dirty="0">
+                <a:solidFill>
+                  <a:srgbClr val="000000"/>
+                </a:solidFill>
+                <a:latin typeface="Arial Unicode MS"/>
+                <a:ea typeface="Arial Unicode MS"/>
+                <a:cs typeface="Arial Unicode MS"/>
+              </a:rPr>
+              <a:t>，救護車經過聲音變調就是這個。所以雷達</a:t>
+            </a:r>
+            <a:r>
+              <a:rPr sz="850" b="1" lang="zh-TW" dirty="0">
+                <a:solidFill>
+                  <a:srgbClr val="000000"/>
+                </a:solidFill>
+                <a:latin typeface="Arial Unicode MS"/>
+                <a:ea typeface="Arial Unicode MS"/>
+                <a:cs typeface="Arial Unicode MS"/>
+              </a:rPr>
+              <a:t>一次量測</a:t>
+            </a:r>
+            <a:r>
+              <a:rPr sz="850" lang="zh-TW" dirty="0">
+                <a:solidFill>
+                  <a:srgbClr val="000000"/>
+                </a:solidFill>
+                <a:latin typeface="Arial Unicode MS"/>
+                <a:ea typeface="Arial Unicode MS"/>
+                <a:cs typeface="Arial Unicode MS"/>
+              </a:rPr>
+              <a:t>就讀出速度，這一行光達沒有。
+</a:t>
+            </a:r>
+          </a:p>
+          <a:p>
+            <a:pPr algn="l">
+              <a:spcBef>
+                <a:spcPts val="0"/>
+              </a:spcBef>
+              <a:spcAft>
+                <a:spcPts val="142"/>
+              </a:spcAft>
+            </a:pPr>
+            <a:r>
+              <a:rPr sz="850" b="1" lang="zh-TW" dirty="0">
+                <a:solidFill>
+                  <a:srgbClr val="000000"/>
+                </a:solidFill>
+                <a:latin typeface="Arial Unicode MS"/>
+                <a:ea typeface="Arial Unicode MS"/>
+                <a:cs typeface="Arial Unicode MS"/>
+              </a:rPr>
+              <a:t>第三格，角度。</a:t>
+            </a:r>
+            <a:r>
+              <a:rPr sz="850" lang="zh-TW" dirty="0">
+                <a:solidFill>
+                  <a:srgbClr val="000000"/>
+                </a:solidFill>
+                <a:latin typeface="Arial Unicode MS"/>
+                <a:ea typeface="Arial Unicode MS"/>
+                <a:cs typeface="Arial Unicode MS"/>
+              </a:rPr>
+              <a:t>雷達靠</a:t>
+            </a:r>
+            <a:r>
+              <a:rPr sz="850" b="1" lang="zh-TW" dirty="0">
+                <a:solidFill>
+                  <a:srgbClr val="000000"/>
+                </a:solidFill>
+                <a:latin typeface="Arial Unicode MS"/>
+                <a:ea typeface="Arial Unicode MS"/>
+                <a:cs typeface="Arial Unicode MS"/>
+              </a:rPr>
+              <a:t>好幾根天線</a:t>
+            </a:r>
+            <a:r>
+              <a:rPr sz="850" lang="zh-TW" dirty="0">
+                <a:solidFill>
+                  <a:srgbClr val="000000"/>
+                </a:solidFill>
+                <a:latin typeface="Arial Unicode MS"/>
+                <a:ea typeface="Arial Unicode MS"/>
+                <a:cs typeface="Arial Unicode MS"/>
+              </a:rPr>
+              <a:t>：波斜斜打過來，右邊那根先碰到，左邊晚一點，差一點點相位，反推回去就是角度。天線愈多，角度分得愈細。
+</a:t>
+            </a:r>
+          </a:p>
+          <a:p>
+            <a:pPr algn="l">
+              <a:spcBef>
+                <a:spcPts val="0"/>
+              </a:spcBef>
+              <a:spcAft>
+                <a:spcPts val="142"/>
+              </a:spcAft>
+            </a:pPr>
+            <a:r>
+              <a:rPr sz="850" lang="zh-TW" dirty="0">
                 <a:solidFill>
                   <a:srgbClr val="000000"/>
                 </a:solidFill>

--- a/第六週(10-15)/第六週_第1節_簡報.pptx
+++ b/第六週(10-15)/第六週_第1節_簡報.pptx
@@ -5440,29 +5440,7 @@
                 <a:ea typeface="Arial Unicode MS"/>
                 <a:cs typeface="Arial Unicode MS"/>
               </a:rPr>
-              <a:t>為什麼一行寫三個？因為這一顆雷達裡面其實有</a:t>
-            </a:r>
-            <a:r>
-              <a:rPr sz="950" b="1" lang="zh-TW" dirty="0">
-                <a:solidFill>
-                  <a:srgbClr val="000000"/>
-                </a:solidFill>
-                <a:latin typeface="Arial Unicode MS"/>
-                <a:ea typeface="Arial Unicode MS"/>
-                <a:cs typeface="Arial Unicode MS"/>
-              </a:rPr>
-              <a:t>兩組天線</a:t>
-            </a:r>
-            <a:r>
-              <a:rPr sz="950" lang="zh-TW" dirty="0">
-                <a:solidFill>
-                  <a:srgbClr val="000000"/>
-                </a:solidFill>
-                <a:latin typeface="Arial Unicode MS"/>
-                <a:ea typeface="Arial Unicode MS"/>
-                <a:cs typeface="Arial Unicode MS"/>
-              </a:rPr>
-              <a:t>：一組看遠，一組看近。看遠的那組看得很遠，但是很窄；看近的那組看得很寬，但是很近。這跟上週 OS1 的 80% 和 10% 一樣——同一顆、兩組數字，而且每一組都綁著條件。
+              <a:t>同一顆雷達，為什麼要寫遠場、近場兩組數字？下一張講。這裡先記住：這跟上週 OS1 的 80% 和 10% 一樣——同一顆、兩組數字，而且每一組都綁著條件。
 </a:t>
             </a:r>
           </a:p>
@@ -5879,19 +5857,41 @@
                 <a:spcPts val="0"/>
               </a:spcBef>
               <a:spcAft>
-                <a:spcPts val="200"/>
+                <a:spcPts val="183"/>
               </a:spcAft>
             </a:pPr>
             <a:r>
-              <a:rPr sz="1200" lang="zh-TW" dirty="0">
-                <a:solidFill>
-                  <a:srgbClr val="000000"/>
-                </a:solidFill>
-                <a:latin typeface="Arial Unicode MS"/>
-                <a:ea typeface="Arial Unicode MS"/>
-                <a:cs typeface="Arial Unicode MS"/>
-              </a:rPr>
-              <a:t>這一張把「兩組數字」講清楚，不然第三節判定的時候各位會搞混。
+              <a:rPr sz="1100" lang="zh-TW" dirty="0">
+                <a:solidFill>
+                  <a:srgbClr val="000000"/>
+                </a:solidFill>
+                <a:latin typeface="Arial Unicode MS"/>
+                <a:ea typeface="Arial Unicode MS"/>
+                <a:cs typeface="Arial Unicode MS"/>
+              </a:rPr>
+              <a:t>上一張的表，每一行都寫兩組數字，遠場一組、近場一組。這一張講</a:t>
+            </a:r>
+            <a:r>
+              <a:rPr sz="1100" b="1" lang="zh-TW" dirty="0">
+                <a:solidFill>
+                  <a:srgbClr val="000000"/>
+                </a:solidFill>
+                <a:latin typeface="Arial Unicode MS"/>
+                <a:ea typeface="Arial Unicode MS"/>
+                <a:cs typeface="Arial Unicode MS"/>
+              </a:rPr>
+              <a:t>為什麼會有兩組</a:t>
+            </a:r>
+            <a:r>
+              <a:rPr sz="1100" lang="zh-TW" dirty="0">
+                <a:solidFill>
+                  <a:srgbClr val="000000"/>
+                </a:solidFill>
+                <a:latin typeface="Arial Unicode MS"/>
+                <a:ea typeface="Arial Unicode MS"/>
+                <a:cs typeface="Arial Unicode MS"/>
+              </a:rPr>
+              <a:t>，還有它對判定有什麼影響，不然第三節判定的時候各位會搞混。
 </a:t>
             </a:r>
           </a:p>
@@ -5901,22 +5901,66 @@
                 <a:spcPts val="0"/>
               </a:spcBef>
               <a:spcAft>
-                <a:spcPts val="200"/>
+                <a:spcPts val="183"/>
               </a:spcAft>
             </a:pPr>
             <a:r>
-              <a:rPr sz="1200" lang="zh-TW" dirty="0">
-                <a:solidFill>
-                  <a:srgbClr val="000000"/>
-                </a:solidFill>
-                <a:latin typeface="Arial Unicode MS"/>
-                <a:ea typeface="Arial Unicode MS"/>
-                <a:cs typeface="Arial Unicode MS"/>
-              </a:rPr>
-              <a:t>底下這一條是剛剛那張表的前五行。天線和時間這兩件事，要回上一張那張大表找，看最底下兩行。最後一行 Antenna channels，寫的是 </a:t>
-            </a:r>
-            <a:r>
-              <a:rPr sz="1200" b="1" lang="zh-TW" dirty="0">
+              <a:rPr sz="1100" lang="zh-TW" dirty="0">
+                <a:solidFill>
+                  <a:srgbClr val="000000"/>
+                </a:solidFill>
+                <a:latin typeface="Arial Unicode MS"/>
+                <a:ea typeface="Arial Unicode MS"/>
+                <a:cs typeface="Arial Unicode MS"/>
+              </a:rPr>
+              <a:t>答案在那張表的</a:t>
+            </a:r>
+            <a:r>
+              <a:rPr sz="1100" b="1" lang="zh-TW" dirty="0">
+                <a:solidFill>
+                  <a:srgbClr val="000000"/>
+                </a:solidFill>
+                <a:latin typeface="Arial Unicode MS"/>
+                <a:ea typeface="Arial Unicode MS"/>
+                <a:cs typeface="Arial Unicode MS"/>
+              </a:rPr>
+              <a:t>最下面兩行</a:t>
+            </a:r>
+            <a:r>
+              <a:rPr sz="1100" lang="zh-TW" dirty="0">
+                <a:solidFill>
+                  <a:srgbClr val="000000"/>
+                </a:solidFill>
+                <a:latin typeface="Arial Unicode MS"/>
+                <a:ea typeface="Arial Unicode MS"/>
+                <a:cs typeface="Arial Unicode MS"/>
+              </a:rPr>
+              <a:t>，就是底下這一條。先看 </a:t>
+            </a:r>
+            <a:r>
+              <a:rPr sz="1100" b="1" lang="zh-TW" dirty="0">
+                <a:solidFill>
+                  <a:srgbClr val="000000"/>
+                </a:solidFill>
+                <a:latin typeface="Arial Unicode MS"/>
+                <a:ea typeface="Arial Unicode MS"/>
+                <a:cs typeface="Arial Unicode MS"/>
+              </a:rPr>
+              <a:t>Antenna channels</a:t>
+            </a:r>
+            <a:r>
+              <a:rPr sz="1100" lang="zh-TW" dirty="0">
+                <a:solidFill>
+                  <a:srgbClr val="000000"/>
+                </a:solidFill>
+                <a:latin typeface="Arial Unicode MS"/>
+                <a:ea typeface="Arial Unicode MS"/>
+                <a:cs typeface="Arial Unicode MS"/>
+              </a:rPr>
+              <a:t>，寫的是 </a:t>
+            </a:r>
+            <a:r>
+              <a:rPr sz="1100" b="1" lang="zh-TW" dirty="0">
                 <a:solidFill>
                   <a:srgbClr val="000000"/>
                 </a:solidFill>
@@ -5927,103 +5971,59 @@
               <a:t>4TX／2×6RX</a:t>
             </a:r>
             <a:r>
-              <a:rPr sz="1200" lang="zh-TW" dirty="0">
-                <a:solidFill>
-                  <a:srgbClr val="000000"/>
-                </a:solidFill>
-                <a:latin typeface="Arial Unicode MS"/>
-                <a:ea typeface="Arial Unicode MS"/>
-                <a:cs typeface="Arial Unicode MS"/>
-              </a:rPr>
-              <a:t>：四根發射天線、兩組各六根接收。其中兩根發射加六根接收</a:t>
-            </a:r>
-            <a:r>
-              <a:rPr sz="1200" b="1" lang="zh-TW" dirty="0">
-                <a:solidFill>
-                  <a:srgbClr val="000000"/>
-                </a:solidFill>
-                <a:latin typeface="Arial Unicode MS"/>
-                <a:ea typeface="Arial Unicode MS"/>
-                <a:cs typeface="Arial Unicode MS"/>
-              </a:rPr>
-              <a:t>看遠</a:t>
-            </a:r>
-            <a:r>
-              <a:rPr sz="1200" lang="zh-TW" dirty="0">
-                <a:solidFill>
-                  <a:srgbClr val="000000"/>
-                </a:solidFill>
-                <a:latin typeface="Arial Unicode MS"/>
-                <a:ea typeface="Arial Unicode MS"/>
-                <a:cs typeface="Arial Unicode MS"/>
-              </a:rPr>
-              <a:t>，另外兩根加六根</a:t>
-            </a:r>
-            <a:r>
-              <a:rPr sz="1200" b="1" lang="zh-TW" dirty="0">
-                <a:solidFill>
-                  <a:srgbClr val="000000"/>
-                </a:solidFill>
-                <a:latin typeface="Arial Unicode MS"/>
-                <a:ea typeface="Arial Unicode MS"/>
-                <a:cs typeface="Arial Unicode MS"/>
-              </a:rPr>
-              <a:t>看近</a:t>
-            </a:r>
-            <a:r>
-              <a:rPr sz="1200" lang="zh-TW" dirty="0">
-                <a:solidFill>
-                  <a:srgbClr val="000000"/>
-                </a:solidFill>
-                <a:latin typeface="Arial Unicode MS"/>
-                <a:ea typeface="Arial Unicode MS"/>
-                <a:cs typeface="Arial Unicode MS"/>
-              </a:rPr>
-              <a:t>。兩組的天線數量一樣多。差別在排法：看遠的那組排得比較開，所以分得細、但看得窄；看近的那組擠在一起，看得寬、但分得粗。倒數第二行 </a:t>
-            </a:r>
-            <a:r>
-              <a:rPr sz="1200" b="1" lang="zh-TW" dirty="0">
-                <a:solidFill>
-                  <a:srgbClr val="000000"/>
-                </a:solidFill>
-                <a:latin typeface="Arial Unicode MS"/>
-                <a:ea typeface="Arial Unicode MS"/>
-                <a:cs typeface="Arial Unicode MS"/>
-              </a:rPr>
-              <a:t>Cycle time</a:t>
-            </a:r>
-            <a:r>
-              <a:rPr sz="1200" lang="zh-TW" dirty="0">
-                <a:solidFill>
-                  <a:srgbClr val="000000"/>
-                </a:solidFill>
-                <a:latin typeface="Arial Unicode MS"/>
-                <a:ea typeface="Arial Unicode MS"/>
-                <a:cs typeface="Arial Unicode MS"/>
-              </a:rPr>
-              <a:t>，大約</a:t>
-            </a:r>
-            <a:r>
-              <a:rPr sz="1200" b="1" lang="zh-TW" dirty="0">
-                <a:solidFill>
-                  <a:srgbClr val="000000"/>
-                </a:solidFill>
-                <a:latin typeface="Arial Unicode MS"/>
-                <a:ea typeface="Arial Unicode MS"/>
-                <a:cs typeface="Arial Unicode MS"/>
-              </a:rPr>
-              <a:t>七十二毫秒</a:t>
-            </a:r>
-            <a:r>
-              <a:rPr sz="1200" lang="zh-TW" dirty="0">
-                <a:solidFill>
-                  <a:srgbClr val="000000"/>
-                </a:solidFill>
-                <a:latin typeface="Arial Unicode MS"/>
-                <a:ea typeface="Arial Unicode MS"/>
-                <a:cs typeface="Arial Unicode MS"/>
-              </a:rPr>
-              <a:t>一輪，遠場、近場在這一輪裡都量一次。一顆雷達，兩組天線，每七十二毫秒兩組都量一次。
+              <a:rPr sz="1100" lang="zh-TW" dirty="0">
+                <a:solidFill>
+                  <a:srgbClr val="000000"/>
+                </a:solidFill>
+                <a:latin typeface="Arial Unicode MS"/>
+                <a:ea typeface="Arial Unicode MS"/>
+                <a:cs typeface="Arial Unicode MS"/>
+              </a:rPr>
+              <a:t>：四根發射天線、兩組各六根接收。後面寫得更清楚：</a:t>
+            </a:r>
+            <a:r>
+              <a:rPr sz="1100" b="1" lang="zh-TW" dirty="0">
+                <a:solidFill>
+                  <a:srgbClr val="000000"/>
+                </a:solidFill>
+                <a:latin typeface="Arial Unicode MS"/>
+                <a:ea typeface="Arial Unicode MS"/>
+                <a:cs typeface="Arial Unicode MS"/>
+              </a:rPr>
+              <a:t>2TX/6RX far</a:t>
+            </a:r>
+            <a:r>
+              <a:rPr sz="1100" lang="zh-TW" dirty="0">
+                <a:solidFill>
+                  <a:srgbClr val="000000"/>
+                </a:solidFill>
+                <a:latin typeface="Arial Unicode MS"/>
+                <a:ea typeface="Arial Unicode MS"/>
+                <a:cs typeface="Arial Unicode MS"/>
+              </a:rPr>
+              <a:t>，兩根發射加六根接收，看遠；</a:t>
+            </a:r>
+            <a:r>
+              <a:rPr sz="1100" b="1" lang="zh-TW" dirty="0">
+                <a:solidFill>
+                  <a:srgbClr val="000000"/>
+                </a:solidFill>
+                <a:latin typeface="Arial Unicode MS"/>
+                <a:ea typeface="Arial Unicode MS"/>
+                <a:cs typeface="Arial Unicode MS"/>
+              </a:rPr>
+              <a:t>2TX/6RX near</a:t>
+            </a:r>
+            <a:r>
+              <a:rPr sz="1100" lang="zh-TW" dirty="0">
+                <a:solidFill>
+                  <a:srgbClr val="000000"/>
+                </a:solidFill>
+                <a:latin typeface="Arial Unicode MS"/>
+                <a:ea typeface="Arial Unicode MS"/>
+                <a:cs typeface="Arial Unicode MS"/>
+              </a:rPr>
+              <a:t>，另外兩根加六根，看近。兩組的天線數量一樣多。差別在排法：看遠的那組排得比較開，所以分得細、但看得窄；看近的那組擠在一起，看得寬、但分得粗。
 </a:t>
             </a:r>
           </a:p>
@@ -6033,19 +6033,63 @@
                 <a:spcPts val="0"/>
               </a:spcBef>
               <a:spcAft>
-                <a:spcPts val="200"/>
+                <a:spcPts val="183"/>
               </a:spcAft>
             </a:pPr>
             <a:r>
-              <a:rPr sz="1200" lang="zh-TW" dirty="0">
-                <a:solidFill>
-                  <a:srgbClr val="000000"/>
-                </a:solidFill>
-                <a:latin typeface="Arial Unicode MS"/>
-                <a:ea typeface="Arial Unicode MS"/>
-                <a:cs typeface="Arial Unicode MS"/>
-              </a:rPr>
-              <a:t>各位的手機背面，大多有一顆廣角、一顆望遠。望遠那顆拍得遠，可是畫面窄；廣角那顆畫面寬，可是遠的東西拍不清楚。ARS 408 的遠場和近場，就像這兩顆鏡頭裝在同一支手機上。
+              <a:rPr sz="1100" lang="zh-TW" dirty="0">
+                <a:solidFill>
+                  <a:srgbClr val="000000"/>
+                </a:solidFill>
+                <a:latin typeface="Arial Unicode MS"/>
+                <a:ea typeface="Arial Unicode MS"/>
+                <a:cs typeface="Arial Unicode MS"/>
+              </a:rPr>
+              <a:t>再看上面那行 </a:t>
+            </a:r>
+            <a:r>
+              <a:rPr sz="1100" b="1" lang="zh-TW" dirty="0">
+                <a:solidFill>
+                  <a:srgbClr val="000000"/>
+                </a:solidFill>
+                <a:latin typeface="Arial Unicode MS"/>
+                <a:ea typeface="Arial Unicode MS"/>
+                <a:cs typeface="Arial Unicode MS"/>
+              </a:rPr>
+              <a:t>Cycle time</a:t>
+            </a:r>
+            <a:r>
+              <a:rPr sz="1100" lang="zh-TW" dirty="0">
+                <a:solidFill>
+                  <a:srgbClr val="000000"/>
+                </a:solidFill>
+                <a:latin typeface="Arial Unicode MS"/>
+                <a:ea typeface="Arial Unicode MS"/>
+                <a:cs typeface="Arial Unicode MS"/>
+              </a:rPr>
+              <a:t>：大約</a:t>
+            </a:r>
+            <a:r>
+              <a:rPr sz="1100" b="1" lang="zh-TW" dirty="0">
+                <a:solidFill>
+                  <a:srgbClr val="000000"/>
+                </a:solidFill>
+                <a:latin typeface="Arial Unicode MS"/>
+                <a:ea typeface="Arial Unicode MS"/>
+                <a:cs typeface="Arial Unicode MS"/>
+              </a:rPr>
+              <a:t>七十二毫秒</a:t>
+            </a:r>
+            <a:r>
+              <a:rPr sz="1100" lang="zh-TW" dirty="0">
+                <a:solidFill>
+                  <a:srgbClr val="000000"/>
+                </a:solidFill>
+                <a:latin typeface="Arial Unicode MS"/>
+                <a:ea typeface="Arial Unicode MS"/>
+                <a:cs typeface="Arial Unicode MS"/>
+              </a:rPr>
+              <a:t>一輪，後面寫 near and far measurement，遠場、近場在這一輪裡都量一次。一顆雷達，兩組天線，每七十二毫秒兩組都量一次。
 </a:t>
             </a:r>
           </a:p>
@@ -6055,41 +6099,19 @@
                 <a:spcPts val="0"/>
               </a:spcBef>
               <a:spcAft>
-                <a:spcPts val="200"/>
+                <a:spcPts val="183"/>
               </a:spcAft>
             </a:pPr>
             <a:r>
-              <a:rPr sz="1200" lang="zh-TW" dirty="0">
-                <a:solidFill>
-                  <a:srgbClr val="000000"/>
-                </a:solidFill>
-                <a:latin typeface="Arial Unicode MS"/>
-                <a:ea typeface="Arial Unicode MS"/>
-                <a:cs typeface="Arial Unicode MS"/>
-              </a:rPr>
-              <a:t>所以遠場、近場不是模式切換，也不是兩顆雷達，是</a:t>
-            </a:r>
-            <a:r>
-              <a:rPr sz="1200" b="1" lang="zh-TW" dirty="0">
-                <a:solidFill>
-                  <a:srgbClr val="000000"/>
-                </a:solidFill>
-                <a:latin typeface="Arial Unicode MS"/>
-                <a:ea typeface="Arial Unicode MS"/>
-                <a:cs typeface="Arial Unicode MS"/>
-              </a:rPr>
-              <a:t>同時存在</a:t>
-            </a:r>
-            <a:r>
-              <a:rPr sz="1200" lang="zh-TW" dirty="0">
-                <a:solidFill>
-                  <a:srgbClr val="000000"/>
-                </a:solidFill>
-                <a:latin typeface="Arial Unicode MS"/>
-                <a:ea typeface="Arial Unicode MS"/>
-                <a:cs typeface="Arial Unicode MS"/>
-              </a:rPr>
-              <a:t>的兩組數字。
+              <a:rPr sz="1100" lang="zh-TW" dirty="0">
+                <a:solidFill>
+                  <a:srgbClr val="000000"/>
+                </a:solidFill>
+                <a:latin typeface="Arial Unicode MS"/>
+                <a:ea typeface="Arial Unicode MS"/>
+                <a:cs typeface="Arial Unicode MS"/>
+              </a:rPr>
+              <a:t>各位的手機背面，大多有一顆廣角、一顆望遠。望遠那顆拍得遠，可是畫面窄；廣角那顆畫面寬，可是遠的東西拍不清楚。ARS 408 的遠場和近場，就像這兩顆鏡頭裝在同一支手機上。
 </a:t>
             </a:r>
           </a:p>
@@ -6099,63 +6121,41 @@
                 <a:spcPts val="0"/>
               </a:spcBef>
               <a:spcAft>
-                <a:spcPts val="200"/>
+                <a:spcPts val="183"/>
               </a:spcAft>
             </a:pPr>
             <a:r>
-              <a:rPr sz="1200" lang="zh-TW" dirty="0">
-                <a:solidFill>
-                  <a:srgbClr val="000000"/>
-                </a:solidFill>
-                <a:latin typeface="Arial Unicode MS"/>
-                <a:ea typeface="Arial Unicode MS"/>
-                <a:cs typeface="Arial Unicode MS"/>
-              </a:rPr>
-              <a:t>這會怎麼影響判定？看一個例子。</a:t>
-            </a:r>
-            <a:r>
-              <a:rPr sz="1200" b="1" lang="zh-TW" dirty="0">
-                <a:solidFill>
-                  <a:srgbClr val="000000"/>
-                </a:solidFill>
-                <a:latin typeface="Arial Unicode MS"/>
-                <a:ea typeface="Arial Unicode MS"/>
-                <a:cs typeface="Arial Unicode MS"/>
-              </a:rPr>
-              <a:t>河內尖峰，四十公尺外的機車。</a:t>
-            </a:r>
-            <a:r>
-              <a:rPr sz="1200" lang="zh-TW" dirty="0">
-                <a:solidFill>
-                  <a:srgbClr val="000000"/>
-                </a:solidFill>
-                <a:latin typeface="Arial Unicode MS"/>
-                <a:ea typeface="Arial Unicode MS"/>
-                <a:cs typeface="Arial Unicode MS"/>
-              </a:rPr>
-              <a:t>四十公尺在近場的範圍裡，近場正負六十度，側面鑽過來的機車看得到。</a:t>
-            </a:r>
-            <a:r>
-              <a:rPr sz="1200" b="1" lang="zh-TW" dirty="0">
-                <a:solidFill>
-                  <a:srgbClr val="000000"/>
-                </a:solidFill>
-                <a:latin typeface="Arial Unicode MS"/>
-                <a:ea typeface="Arial Unicode MS"/>
-                <a:cs typeface="Arial Unicode MS"/>
-              </a:rPr>
-              <a:t>國道，一百五十公尺外的車。</a:t>
-            </a:r>
-            <a:r>
-              <a:rPr sz="1200" lang="zh-TW" dirty="0">
-                <a:solidFill>
-                  <a:srgbClr val="000000"/>
-                </a:solidFill>
-                <a:latin typeface="Arial Unicode MS"/>
-                <a:ea typeface="Arial Unicode MS"/>
-                <a:cs typeface="Arial Unicode MS"/>
-              </a:rPr>
-              <a:t>一百五十公尺已經超過近場的七十公尺，只剩遠場——正負九度。前面那一道的車看得到，隔壁車道準備切過來的，要等它進到正負九度裡面才看得到。
+              <a:rPr sz="1100" lang="zh-TW" dirty="0">
+                <a:solidFill>
+                  <a:srgbClr val="000000"/>
+                </a:solidFill>
+                <a:latin typeface="Arial Unicode MS"/>
+                <a:ea typeface="Arial Unicode MS"/>
+                <a:cs typeface="Arial Unicode MS"/>
+              </a:rPr>
+              <a:t>所以遠場、近場不是模式切換，也不是兩顆雷達，是</a:t>
+            </a:r>
+            <a:r>
+              <a:rPr sz="1100" b="1" lang="zh-TW" dirty="0">
+                <a:solidFill>
+                  <a:srgbClr val="000000"/>
+                </a:solidFill>
+                <a:latin typeface="Arial Unicode MS"/>
+                <a:ea typeface="Arial Unicode MS"/>
+                <a:cs typeface="Arial Unicode MS"/>
+              </a:rPr>
+              <a:t>同時存在</a:t>
+            </a:r>
+            <a:r>
+              <a:rPr sz="1100" lang="zh-TW" dirty="0">
+                <a:solidFill>
+                  <a:srgbClr val="000000"/>
+                </a:solidFill>
+                <a:latin typeface="Arial Unicode MS"/>
+                <a:ea typeface="Arial Unicode MS"/>
+                <a:cs typeface="Arial Unicode MS"/>
+              </a:rPr>
+              <a:t>的兩組數字。
 </a:t>
             </a:r>
           </a:p>
@@ -6165,19 +6165,63 @@
                 <a:spcPts val="0"/>
               </a:spcBef>
               <a:spcAft>
-                <a:spcPts val="200"/>
+                <a:spcPts val="183"/>
               </a:spcAft>
             </a:pPr>
             <a:r>
-              <a:rPr sz="1200" lang="zh-TW" dirty="0">
-                <a:solidFill>
-                  <a:srgbClr val="000000"/>
-                </a:solidFill>
-                <a:latin typeface="Arial Unicode MS"/>
-                <a:ea typeface="Arial Unicode MS"/>
-                <a:cs typeface="Arial Unicode MS"/>
-              </a:rPr>
-              <a:t>判讀台上「視野」那一行會告訴你，你現在的目標距離落在哪一組。四十公尺寫近場，一百五十公尺寫遠場、後面有一個琥珀色的警告。
+              <a:rPr sz="1100" lang="zh-TW" dirty="0">
+                <a:solidFill>
+                  <a:srgbClr val="000000"/>
+                </a:solidFill>
+                <a:latin typeface="Arial Unicode MS"/>
+                <a:ea typeface="Arial Unicode MS"/>
+                <a:cs typeface="Arial Unicode MS"/>
+              </a:rPr>
+              <a:t>這會怎麼影響判定？看一個例子。</a:t>
+            </a:r>
+            <a:r>
+              <a:rPr sz="1100" b="1" lang="zh-TW" dirty="0">
+                <a:solidFill>
+                  <a:srgbClr val="000000"/>
+                </a:solidFill>
+                <a:latin typeface="Arial Unicode MS"/>
+                <a:ea typeface="Arial Unicode MS"/>
+                <a:cs typeface="Arial Unicode MS"/>
+              </a:rPr>
+              <a:t>河內尖峰，四十公尺外的機車。</a:t>
+            </a:r>
+            <a:r>
+              <a:rPr sz="1100" lang="zh-TW" dirty="0">
+                <a:solidFill>
+                  <a:srgbClr val="000000"/>
+                </a:solidFill>
+                <a:latin typeface="Arial Unicode MS"/>
+                <a:ea typeface="Arial Unicode MS"/>
+                <a:cs typeface="Arial Unicode MS"/>
+              </a:rPr>
+              <a:t>四十公尺在近場的範圍裡，近場正負六十度，側面鑽過來的機車看得到。</a:t>
+            </a:r>
+            <a:r>
+              <a:rPr sz="1100" b="1" lang="zh-TW" dirty="0">
+                <a:solidFill>
+                  <a:srgbClr val="000000"/>
+                </a:solidFill>
+                <a:latin typeface="Arial Unicode MS"/>
+                <a:ea typeface="Arial Unicode MS"/>
+                <a:cs typeface="Arial Unicode MS"/>
+              </a:rPr>
+              <a:t>國道，一百五十公尺外的車。</a:t>
+            </a:r>
+            <a:r>
+              <a:rPr sz="1100" lang="zh-TW" dirty="0">
+                <a:solidFill>
+                  <a:srgbClr val="000000"/>
+                </a:solidFill>
+                <a:latin typeface="Arial Unicode MS"/>
+                <a:ea typeface="Arial Unicode MS"/>
+                <a:cs typeface="Arial Unicode MS"/>
+              </a:rPr>
+              <a:t>一百五十公尺已經超過近場的七十公尺，只剩遠場——正負九度。前面那一道的車看得到，隔壁車道準備切過來的，要等它進到正負九度裡面才看得到。
 </a:t>
             </a:r>
           </a:p>
@@ -6187,11 +6231,33 @@
                 <a:spcPts val="0"/>
               </a:spcBef>
               <a:spcAft>
-                <a:spcPts val="200"/>
+                <a:spcPts val="183"/>
               </a:spcAft>
             </a:pPr>
             <a:r>
-              <a:rPr sz="1200" lang="zh-TW" dirty="0">
+              <a:rPr sz="1100" lang="zh-TW" dirty="0">
+                <a:solidFill>
+                  <a:srgbClr val="000000"/>
+                </a:solidFill>
+                <a:latin typeface="Arial Unicode MS"/>
+                <a:ea typeface="Arial Unicode MS"/>
+                <a:cs typeface="Arial Unicode MS"/>
+              </a:rPr>
+              <a:t>判讀台上「視野」那一行會告訴你，你現在的目標距離落在哪一組。四十公尺寫近場，一百五十公尺寫遠場、後面有一個琥珀色的警告。
+</a:t>
+            </a:r>
+          </a:p>
+          <a:p>
+            <a:pPr algn="l">
+              <a:spcBef>
+                <a:spcPts val="0"/>
+              </a:spcBef>
+              <a:spcAft>
+                <a:spcPts val="183"/>
+              </a:spcAft>
+            </a:pPr>
+            <a:r>
+              <a:rPr sz="1100" lang="zh-TW" dirty="0">
                 <a:solidFill>
                   <a:srgbClr val="000000"/>
                 </a:solidFill>
@@ -6202,7 +6268,7 @@
               <a:t>買雷達之前要問的問題就是這一句：</a:t>
             </a:r>
             <a:r>
-              <a:rPr sz="1200" b="1" lang="zh-TW" dirty="0">
+              <a:rPr sz="1100" b="1" lang="zh-TW" dirty="0">
                 <a:solidFill>
                   <a:srgbClr val="000000"/>
                 </a:solidFill>
@@ -7430,11 +7496,11 @@
                 <a:spcPts val="0"/>
               </a:spcBef>
               <a:spcAft>
-                <a:spcPts val="142"/>
+                <a:spcPts val="133"/>
               </a:spcAft>
             </a:pPr>
             <a:r>
-              <a:rPr sz="850" lang="zh-TW" dirty="0">
+              <a:rPr sz="800" lang="zh-TW" dirty="0">
                 <a:solidFill>
                   <a:srgbClr val="000000"/>
                 </a:solidFill>
@@ -7452,11 +7518,11 @@
                 <a:spcPts val="0"/>
               </a:spcBef>
               <a:spcAft>
-                <a:spcPts val="142"/>
+                <a:spcPts val="133"/>
               </a:spcAft>
             </a:pPr>
             <a:r>
-              <a:rPr sz="850" b="1" lang="zh-TW" dirty="0">
+              <a:rPr sz="800" b="1" lang="zh-TW" dirty="0">
                 <a:solidFill>
                   <a:srgbClr val="000000"/>
                 </a:solidFill>
@@ -7467,7 +7533,7 @@
               <a:t>Velocity range</a:t>
             </a:r>
             <a:r>
-              <a:rPr sz="850" lang="zh-TW" dirty="0">
+              <a:rPr sz="800" lang="zh-TW" dirty="0">
                 <a:solidFill>
                   <a:srgbClr val="000000"/>
                 </a:solidFill>
@@ -7478,7 +7544,7 @@
               <a:t>，速度量程，負四百到正兩百公里。這是量得到的</a:t>
             </a:r>
             <a:r>
-              <a:rPr sz="850" b="1" lang="zh-TW" dirty="0">
+              <a:rPr sz="800" b="1" lang="zh-TW" dirty="0">
                 <a:solidFill>
                   <a:srgbClr val="000000"/>
                 </a:solidFill>
@@ -7489,7 +7555,7 @@
               <a:t>相對速度範圍</a:t>
             </a:r>
             <a:r>
-              <a:rPr sz="850" lang="zh-TW" dirty="0">
+              <a:rPr sz="800" lang="zh-TW" dirty="0">
                 <a:solidFill>
                   <a:srgbClr val="000000"/>
                 </a:solidFill>
@@ -7507,11 +7573,11 @@
                 <a:spcPts val="0"/>
               </a:spcBef>
               <a:spcAft>
-                <a:spcPts val="142"/>
+                <a:spcPts val="133"/>
               </a:spcAft>
             </a:pPr>
             <a:r>
-              <a:rPr sz="850" lang="zh-TW" dirty="0">
+              <a:rPr sz="800" lang="zh-TW" dirty="0">
                 <a:solidFill>
                   <a:srgbClr val="000000"/>
                 </a:solidFill>
@@ -7522,7 +7588,7 @@
               <a:t>那負的是什麼意思？負號不是速度比零小，是</a:t>
             </a:r>
             <a:r>
-              <a:rPr sz="850" b="1" lang="zh-TW" dirty="0">
+              <a:rPr sz="800" b="1" lang="zh-TW" dirty="0">
                 <a:solidFill>
                   <a:srgbClr val="000000"/>
                 </a:solidFill>
@@ -7533,7 +7599,7 @@
               <a:t>方向</a:t>
             </a:r>
             <a:r>
-              <a:rPr sz="850" lang="zh-TW" dirty="0">
+              <a:rPr sz="800" lang="zh-TW" dirty="0">
                 <a:solidFill>
                   <a:srgbClr val="000000"/>
                 </a:solidFill>
@@ -7551,11 +7617,11 @@
                 <a:spcPts val="0"/>
               </a:spcBef>
               <a:spcAft>
-                <a:spcPts val="142"/>
+                <a:spcPts val="133"/>
               </a:spcAft>
             </a:pPr>
             <a:r>
-              <a:rPr sz="850" lang="zh-TW" dirty="0">
+              <a:rPr sz="800" lang="zh-TW" dirty="0">
                 <a:solidFill>
                   <a:srgbClr val="000000"/>
                 </a:solidFill>
@@ -7573,11 +7639,11 @@
                 <a:spcPts val="0"/>
               </a:spcBef>
               <a:spcAft>
-                <a:spcPts val="142"/>
+                <a:spcPts val="133"/>
               </a:spcAft>
             </a:pPr>
             <a:r>
-              <a:rPr sz="850" lang="zh-TW" dirty="0">
+              <a:rPr sz="800" lang="zh-TW" dirty="0">
                 <a:solidFill>
                   <a:srgbClr val="000000"/>
                 </a:solidFill>
@@ -7588,7 +7654,7 @@
               <a:t>第一，前車比我快三十公里，慢慢拉開，量到</a:t>
             </a:r>
             <a:r>
-              <a:rPr sz="850" b="1" lang="zh-TW" dirty="0">
+              <a:rPr sz="800" b="1" lang="zh-TW" dirty="0">
                 <a:solidFill>
                   <a:srgbClr val="000000"/>
                 </a:solidFill>
@@ -7599,7 +7665,7 @@
               <a:t>負三十</a:t>
             </a:r>
             <a:r>
-              <a:rPr sz="850" lang="zh-TW" dirty="0">
+              <a:rPr sz="800" lang="zh-TW" dirty="0">
                 <a:solidFill>
                   <a:srgbClr val="000000"/>
                 </a:solidFill>
@@ -7617,11 +7683,11 @@
                 <a:spcPts val="0"/>
               </a:spcBef>
               <a:spcAft>
-                <a:spcPts val="142"/>
+                <a:spcPts val="133"/>
               </a:spcAft>
             </a:pPr>
             <a:r>
-              <a:rPr sz="850" lang="zh-TW" dirty="0">
+              <a:rPr sz="800" lang="zh-TW" dirty="0">
                 <a:solidFill>
                   <a:srgbClr val="000000"/>
                 </a:solidFill>
@@ -7632,7 +7698,7 @@
               <a:t>第二，我追上一台比我慢二十公里的車，量到</a:t>
             </a:r>
             <a:r>
-              <a:rPr sz="850" b="1" lang="zh-TW" dirty="0">
+              <a:rPr sz="800" b="1" lang="zh-TW" dirty="0">
                 <a:solidFill>
                   <a:srgbClr val="000000"/>
                 </a:solidFill>
@@ -7643,7 +7709,7 @@
               <a:t>正二十</a:t>
             </a:r>
             <a:r>
-              <a:rPr sz="850" lang="zh-TW" dirty="0">
+              <a:rPr sz="800" lang="zh-TW" dirty="0">
                 <a:solidFill>
                   <a:srgbClr val="000000"/>
                 </a:solidFill>
@@ -7661,11 +7727,11 @@
                 <a:spcPts val="0"/>
               </a:spcBef>
               <a:spcAft>
-                <a:spcPts val="142"/>
+                <a:spcPts val="133"/>
               </a:spcAft>
             </a:pPr>
             <a:r>
-              <a:rPr sz="850" lang="zh-TW" dirty="0">
+              <a:rPr sz="800" lang="zh-TW" dirty="0">
                 <a:solidFill>
                   <a:srgbClr val="000000"/>
                 </a:solidFill>
@@ -7676,7 +7742,7 @@
               <a:t>第三，對向來車，兩台都開一百，相對速度就是</a:t>
             </a:r>
             <a:r>
-              <a:rPr sz="850" b="1" lang="zh-TW" dirty="0">
+              <a:rPr sz="800" b="1" lang="zh-TW" dirty="0">
                 <a:solidFill>
                   <a:srgbClr val="000000"/>
                 </a:solidFill>
@@ -7687,7 +7753,7 @@
               <a:t>正兩百</a:t>
             </a:r>
             <a:r>
-              <a:rPr sz="850" lang="zh-TW" dirty="0">
+              <a:rPr sz="800" lang="zh-TW" dirty="0">
                 <a:solidFill>
                   <a:srgbClr val="000000"/>
                 </a:solidFill>
@@ -7705,11 +7771,11 @@
                 <a:spcPts val="0"/>
               </a:spcBef>
               <a:spcAft>
-                <a:spcPts val="142"/>
+                <a:spcPts val="133"/>
               </a:spcAft>
             </a:pPr>
             <a:r>
-              <a:rPr sz="850" lang="zh-TW" dirty="0">
+              <a:rPr sz="800" lang="zh-TW" dirty="0">
                 <a:solidFill>
                   <a:srgbClr val="000000"/>
                 </a:solidFill>
@@ -7727,11 +7793,11 @@
                 <a:spcPts val="0"/>
               </a:spcBef>
               <a:spcAft>
-                <a:spcPts val="142"/>
+                <a:spcPts val="133"/>
               </a:spcAft>
             </a:pPr>
             <a:r>
-              <a:rPr sz="850" b="1" lang="zh-TW" dirty="0">
+              <a:rPr sz="800" b="1" lang="zh-TW" dirty="0">
                 <a:solidFill>
                   <a:srgbClr val="000000"/>
                 </a:solidFill>
@@ -7742,7 +7808,7 @@
               <a:t>Velocity resolution，速度解析度，零點三七公里。</a:t>
             </a:r>
             <a:r>
-              <a:rPr sz="850" lang="zh-TW" dirty="0">
+              <a:rPr sz="800" lang="zh-TW" dirty="0">
                 <a:solidFill>
                   <a:srgbClr val="000000"/>
                 </a:solidFill>
@@ -7760,41 +7826,63 @@
                 <a:spcPts val="0"/>
               </a:spcBef>
               <a:spcAft>
-                <a:spcPts val="142"/>
+                <a:spcPts val="133"/>
               </a:spcAft>
             </a:pPr>
             <a:r>
-              <a:rPr sz="850" lang="zh-TW" dirty="0">
-                <a:solidFill>
-                  <a:srgbClr val="000000"/>
-                </a:solidFill>
-                <a:latin typeface="Arial Unicode MS"/>
-                <a:ea typeface="Arial Unicode MS"/>
-                <a:cs typeface="Arial Unicode MS"/>
-              </a:rPr>
-              <a:t>為什麼沒有？因為光達不量速度。光達只量「現在在哪」，要知道速度，得拿這一張和上一張的位置相減，像拿兩張照片比一比。十赫茲的話，兩張差一百毫秒；中間車子加速或變道，它都要等下一張才知道。雷達用都卜勒，</a:t>
-            </a:r>
-            <a:r>
-              <a:rPr sz="850" b="1" lang="zh-TW" dirty="0">
-                <a:solidFill>
-                  <a:srgbClr val="000000"/>
-                </a:solidFill>
-                <a:latin typeface="Arial Unicode MS"/>
-                <a:ea typeface="Arial Unicode MS"/>
-                <a:cs typeface="Arial Unicode MS"/>
-              </a:rPr>
-              <a:t>一次量測就把速度讀出來</a:t>
-            </a:r>
-            <a:r>
-              <a:rPr sz="850" lang="zh-TW" dirty="0">
-                <a:solidFill>
-                  <a:srgbClr val="000000"/>
-                </a:solidFill>
-                <a:latin typeface="Arial Unicode MS"/>
-                <a:ea typeface="Arial Unicode MS"/>
-                <a:cs typeface="Arial Unicode MS"/>
-              </a:rPr>
-              <a:t>，第四張講過。就像警察的測速槍，按一下就有數字，不用等第二次。
+              <a:rPr sz="800" lang="zh-TW" dirty="0">
+                <a:solidFill>
+                  <a:srgbClr val="000000"/>
+                </a:solidFill>
+                <a:latin typeface="Arial Unicode MS"/>
+                <a:ea typeface="Arial Unicode MS"/>
+                <a:cs typeface="Arial Unicode MS"/>
+              </a:rPr>
+              <a:t>下一行 </a:t>
+            </a:r>
+            <a:r>
+              <a:rPr sz="800" b="1" lang="zh-TW" dirty="0">
+                <a:solidFill>
+                  <a:srgbClr val="000000"/>
+                </a:solidFill>
+                <a:latin typeface="Arial Unicode MS"/>
+                <a:ea typeface="Arial Unicode MS"/>
+                <a:cs typeface="Arial Unicode MS"/>
+              </a:rPr>
+              <a:t>Velocity accuracy，速度準確度，正負零點一公里。</a:t>
+            </a:r>
+            <a:r>
+              <a:rPr sz="800" lang="zh-TW" dirty="0">
+                <a:solidFill>
+                  <a:srgbClr val="000000"/>
+                </a:solidFill>
+                <a:latin typeface="Arial Unicode MS"/>
+                <a:ea typeface="Arial Unicode MS"/>
+                <a:cs typeface="Arial Unicode MS"/>
+              </a:rPr>
+              <a:t>它跟上面那一行不一樣，差別跟第五張講角度時一樣：</a:t>
+            </a:r>
+            <a:r>
+              <a:rPr sz="800" b="1" lang="zh-TW" dirty="0">
+                <a:solidFill>
+                  <a:srgbClr val="000000"/>
+                </a:solidFill>
+                <a:latin typeface="Arial Unicode MS"/>
+                <a:ea typeface="Arial Unicode MS"/>
+                <a:cs typeface="Arial Unicode MS"/>
+              </a:rPr>
+              <a:t>準確度講一個東西，解析度講兩個東西。</a:t>
+            </a:r>
+            <a:r>
+              <a:rPr sz="800" lang="zh-TW" dirty="0">
+                <a:solidFill>
+                  <a:srgbClr val="000000"/>
+                </a:solidFill>
+                <a:latin typeface="Arial Unicode MS"/>
+                <a:ea typeface="Arial Unicode MS"/>
+                <a:cs typeface="Arial Unicode MS"/>
+              </a:rPr>
+              <a:t>準確度是：前面只有一台車，量出來的速度跟真正的速度最多差多少。解析度是：前面有兩台車，速度要差多少，它才分得出是兩台。
 </a:t>
             </a:r>
           </a:p>
@@ -7804,41 +7892,19 @@
                 <a:spcPts val="0"/>
               </a:spcBef>
               <a:spcAft>
-                <a:spcPts val="142"/>
+                <a:spcPts val="133"/>
               </a:spcAft>
             </a:pPr>
             <a:r>
-              <a:rPr sz="850" lang="zh-TW" dirty="0">
-                <a:solidFill>
-                  <a:srgbClr val="000000"/>
-                </a:solidFill>
-                <a:latin typeface="Arial Unicode MS"/>
-                <a:ea typeface="Arial Unicode MS"/>
-                <a:cs typeface="Arial Unicode MS"/>
-              </a:rPr>
-              <a:t>有一點要注意：雷達量到的，只是</a:t>
-            </a:r>
-            <a:r>
-              <a:rPr sz="850" b="1" lang="zh-TW" dirty="0">
-                <a:solidFill>
-                  <a:srgbClr val="000000"/>
-                </a:solidFill>
-                <a:latin typeface="Arial Unicode MS"/>
-                <a:ea typeface="Arial Unicode MS"/>
-                <a:cs typeface="Arial Unicode MS"/>
-              </a:rPr>
-              <a:t>朝著它靠近或遠離</a:t>
-            </a:r>
-            <a:r>
-              <a:rPr sz="850" lang="zh-TW" dirty="0">
-                <a:solidFill>
-                  <a:srgbClr val="000000"/>
-                </a:solidFill>
-                <a:latin typeface="Arial Unicode MS"/>
-                <a:ea typeface="Arial Unicode MS"/>
-                <a:cs typeface="Arial Unicode MS"/>
-              </a:rPr>
-              <a:t>的那一份速度。救護車從你正前方橫著開過去的那一瞬間，警笛不高也不低。路口橫著穿過去的機車也一樣，雷達量到的速度接近零，要看它的位置怎麼變，才知道它往哪裡走。
+              <a:rPr sz="800" lang="zh-TW" dirty="0">
+                <a:solidFill>
+                  <a:srgbClr val="000000"/>
+                </a:solidFill>
+                <a:latin typeface="Arial Unicode MS"/>
+                <a:ea typeface="Arial Unicode MS"/>
+                <a:cs typeface="Arial Unicode MS"/>
+              </a:rPr>
+              <a:t>舉個例子。前車真的比你慢二十公里，雷達報出來會在十九點九到二十點一之間，這是準確度。旁邊並排還有一台，比你慢二十點二公里，兩台只差零點二，比零點三七還小，距離和方向又差不多，雷達就把兩台當成一台，這是解析度。表上旁邊那一欄寫 point targets，意思是在理想的小目標上量的，真的車子形狀複雜，會差一點。
 </a:t>
             </a:r>
           </a:p>
@@ -7848,30 +7914,41 @@
                 <a:spcPts val="0"/>
               </a:spcBef>
               <a:spcAft>
-                <a:spcPts val="142"/>
+                <a:spcPts val="133"/>
               </a:spcAft>
             </a:pPr>
             <a:r>
-              <a:rPr sz="850" b="1" lang="zh-TW" dirty="0">
-                <a:solidFill>
-                  <a:srgbClr val="000000"/>
-                </a:solidFill>
-                <a:latin typeface="Arial Unicode MS"/>
-                <a:ea typeface="Arial Unicode MS"/>
-                <a:cs typeface="Arial Unicode MS"/>
-              </a:rPr>
-              <a:t>Cycle time，七十二毫秒。</a:t>
-            </a:r>
-            <a:r>
-              <a:rPr sz="850" lang="zh-TW" dirty="0">
-                <a:solidFill>
-                  <a:srgbClr val="000000"/>
-                </a:solidFill>
-                <a:latin typeface="Arial Unicode MS"/>
-                <a:ea typeface="Arial Unicode MS"/>
-                <a:cs typeface="Arial Unicode MS"/>
-              </a:rPr>
-              <a:t>一秒鐘量十四次，遠場近場各一次。這就是它的更新率，比 OS1 的十赫茲快一點。
+              <a:rPr sz="800" lang="zh-TW" dirty="0">
+                <a:solidFill>
+                  <a:srgbClr val="000000"/>
+                </a:solidFill>
+                <a:latin typeface="Arial Unicode MS"/>
+                <a:ea typeface="Arial Unicode MS"/>
+                <a:cs typeface="Arial Unicode MS"/>
+              </a:rPr>
+              <a:t>為什麼沒有？因為光達不量速度。光達只量「現在在哪」，要知道速度，得拿這一張和上一張的位置相減，像拿兩張照片比一比。十赫茲的話，兩張差一百毫秒；中間車子加速或變道，它都要等下一張才知道。雷達用都卜勒，</a:t>
+            </a:r>
+            <a:r>
+              <a:rPr sz="800" b="1" lang="zh-TW" dirty="0">
+                <a:solidFill>
+                  <a:srgbClr val="000000"/>
+                </a:solidFill>
+                <a:latin typeface="Arial Unicode MS"/>
+                <a:ea typeface="Arial Unicode MS"/>
+                <a:cs typeface="Arial Unicode MS"/>
+              </a:rPr>
+              <a:t>一次量測就把速度讀出來</a:t>
+            </a:r>
+            <a:r>
+              <a:rPr sz="800" lang="zh-TW" dirty="0">
+                <a:solidFill>
+                  <a:srgbClr val="000000"/>
+                </a:solidFill>
+                <a:latin typeface="Arial Unicode MS"/>
+                <a:ea typeface="Arial Unicode MS"/>
+                <a:cs typeface="Arial Unicode MS"/>
+              </a:rPr>
+              <a:t>，第四張講過。就像警察的測速槍，按一下就有數字，不用等第二次。
 </a:t>
             </a:r>
           </a:p>
@@ -7881,11 +7958,88 @@
                 <a:spcPts val="0"/>
               </a:spcBef>
               <a:spcAft>
-                <a:spcPts val="142"/>
+                <a:spcPts val="133"/>
               </a:spcAft>
             </a:pPr>
             <a:r>
-              <a:rPr sz="850" lang="zh-TW" dirty="0">
+              <a:rPr sz="800" lang="zh-TW" dirty="0">
+                <a:solidFill>
+                  <a:srgbClr val="000000"/>
+                </a:solidFill>
+                <a:latin typeface="Arial Unicode MS"/>
+                <a:ea typeface="Arial Unicode MS"/>
+                <a:cs typeface="Arial Unicode MS"/>
+              </a:rPr>
+              <a:t>有一點要注意：雷達量到的，只是</a:t>
+            </a:r>
+            <a:r>
+              <a:rPr sz="800" b="1" lang="zh-TW" dirty="0">
+                <a:solidFill>
+                  <a:srgbClr val="000000"/>
+                </a:solidFill>
+                <a:latin typeface="Arial Unicode MS"/>
+                <a:ea typeface="Arial Unicode MS"/>
+                <a:cs typeface="Arial Unicode MS"/>
+              </a:rPr>
+              <a:t>朝著它靠近或遠離</a:t>
+            </a:r>
+            <a:r>
+              <a:rPr sz="800" lang="zh-TW" dirty="0">
+                <a:solidFill>
+                  <a:srgbClr val="000000"/>
+                </a:solidFill>
+                <a:latin typeface="Arial Unicode MS"/>
+                <a:ea typeface="Arial Unicode MS"/>
+                <a:cs typeface="Arial Unicode MS"/>
+              </a:rPr>
+              <a:t>的那一份速度。救護車從你正前方橫著開過去的那一瞬間，警笛不高也不低。路口橫著穿過去的機車也一樣，雷達量到的速度接近零，要看它的位置怎麼變，才知道它往哪裡走。
+</a:t>
+            </a:r>
+          </a:p>
+          <a:p>
+            <a:pPr algn="l">
+              <a:spcBef>
+                <a:spcPts val="0"/>
+              </a:spcBef>
+              <a:spcAft>
+                <a:spcPts val="133"/>
+              </a:spcAft>
+            </a:pPr>
+            <a:r>
+              <a:rPr sz="800" b="1" lang="zh-TW" dirty="0">
+                <a:solidFill>
+                  <a:srgbClr val="000000"/>
+                </a:solidFill>
+                <a:latin typeface="Arial Unicode MS"/>
+                <a:ea typeface="Arial Unicode MS"/>
+                <a:cs typeface="Arial Unicode MS"/>
+              </a:rPr>
+              <a:t>Cycle time，七十二毫秒。</a:t>
+            </a:r>
+            <a:r>
+              <a:rPr sz="800" lang="zh-TW" dirty="0">
+                <a:solidFill>
+                  <a:srgbClr val="000000"/>
+                </a:solidFill>
+                <a:latin typeface="Arial Unicode MS"/>
+                <a:ea typeface="Arial Unicode MS"/>
+                <a:cs typeface="Arial Unicode MS"/>
+              </a:rPr>
+              <a:t>一秒鐘量十四次，遠場近場各一次。這就是它的更新率，比 OS1 的十赫茲快一點。
+</a:t>
+            </a:r>
+          </a:p>
+          <a:p>
+            <a:pPr algn="l">
+              <a:spcBef>
+                <a:spcPts val="0"/>
+              </a:spcBef>
+              <a:spcAft>
+                <a:spcPts val="133"/>
+              </a:spcAft>
+            </a:pPr>
+            <a:r>
+              <a:rPr sz="800" lang="zh-TW" dirty="0">
                 <a:solidFill>
                   <a:srgbClr val="000000"/>
                 </a:solidFill>
@@ -19647,7 +19801,7 @@
       </p:sp>
       <p:pic>
         <p:nvPicPr>
-          <p:cNvPr id="5" name="Image 0" descr="/Users/tsengchenghsun/Class/carClass/Claude outputs/第六週(10-15)/src/img/w6_ars408_rangefov.png">    </p:cNvPr>
+          <p:cNvPr id="5" name="Image 0" descr="/Users/tsengchenghsun/Class/carClass/Claude outputs/第六週(10-15)/src/img/w6_ars408_cycant.png">    </p:cNvPr>
           <p:cNvPicPr>
             <a:picLocks noChangeAspect="1"/>
           </p:cNvPicPr>
@@ -19661,8 +19815,8 @@
         </p:blipFill>
         <p:spPr>
           <a:xfrm>
-            <a:off x="2796845" y="2706624"/>
-            <a:ext cx="3550310" cy="914400"/>
+            <a:off x="701749" y="2706624"/>
+            <a:ext cx="7740502" cy="914400"/>
           </a:xfrm>
           <a:prstGeom prst="rect">
             <a:avLst/>

--- a/第六週(10-15)/第六週_第1節_簡報.pptx
+++ b/第六週(10-15)/第六週_第1節_簡報.pptx
@@ -2007,11 +2007,11 @@
                 <a:spcPts val="0"/>
               </a:spcBef>
               <a:spcAft>
-                <a:spcPts val="192"/>
+                <a:spcPts val="133"/>
               </a:spcAft>
             </a:pPr>
             <a:r>
-              <a:rPr sz="1150" lang="zh-TW" dirty="0">
+              <a:rPr sz="800" lang="zh-TW" dirty="0">
                 <a:solidFill>
                   <a:srgbClr val="000000"/>
                 </a:solidFill>
@@ -2022,7 +2022,7 @@
               <a:t>第二個型號，</a:t>
             </a:r>
             <a:r>
-              <a:rPr sz="1150" b="1" lang="zh-TW" dirty="0">
+              <a:rPr sz="800" b="1" lang="zh-TW" dirty="0">
                 <a:solidFill>
                   <a:srgbClr val="000000"/>
                 </a:solidFill>
@@ -2033,7 +2033,7 @@
               <a:t>ARS 548 RDI</a:t>
             </a:r>
             <a:r>
-              <a:rPr sz="1150" lang="zh-TW" dirty="0">
+              <a:rPr sz="800" lang="zh-TW" dirty="0">
                 <a:solidFill>
                   <a:srgbClr val="000000"/>
                 </a:solidFill>
@@ -2051,11 +2051,11 @@
                 <a:spcPts val="0"/>
               </a:spcBef>
               <a:spcAft>
-                <a:spcPts val="192"/>
+                <a:spcPts val="133"/>
               </a:spcAft>
             </a:pPr>
             <a:r>
-              <a:rPr sz="1150" lang="zh-TW" dirty="0">
+              <a:rPr sz="800" lang="zh-TW" dirty="0">
                 <a:solidFill>
                   <a:srgbClr val="000000"/>
                 </a:solidFill>
@@ -2073,11 +2073,11 @@
                 <a:spcPts val="0"/>
               </a:spcBef>
               <a:spcAft>
-                <a:spcPts val="192"/>
+                <a:spcPts val="133"/>
               </a:spcAft>
             </a:pPr>
             <a:r>
-              <a:rPr sz="1150" lang="zh-TW" dirty="0">
+              <a:rPr sz="800" lang="zh-TW" dirty="0">
                 <a:solidFill>
                   <a:srgbClr val="000000"/>
                 </a:solidFill>
@@ -2088,7 +2088,7 @@
               <a:t>先看最下面那一行 </a:t>
             </a:r>
             <a:r>
-              <a:rPr sz="1150" b="1" lang="zh-TW" dirty="0">
+              <a:rPr sz="800" b="1" lang="zh-TW" dirty="0">
                 <a:solidFill>
                   <a:srgbClr val="000000"/>
                 </a:solidFill>
@@ -2099,7 +2099,7 @@
               <a:t>Antenna channels：16 收、12 發，一百九十二個虛擬天線。</a:t>
             </a:r>
             <a:r>
-              <a:rPr sz="1150" lang="zh-TW" dirty="0">
+              <a:rPr sz="800" lang="zh-TW" dirty="0">
                 <a:solidFill>
                   <a:srgbClr val="000000"/>
                 </a:solidFill>
@@ -2117,11 +2117,11 @@
                 <a:spcPts val="0"/>
               </a:spcBef>
               <a:spcAft>
-                <a:spcPts val="192"/>
+                <a:spcPts val="133"/>
               </a:spcAft>
             </a:pPr>
             <a:r>
-              <a:rPr sz="1150" lang="zh-TW" dirty="0">
+              <a:rPr sz="800" lang="zh-TW" dirty="0">
                 <a:solidFill>
                   <a:srgbClr val="000000"/>
                 </a:solidFill>
@@ -2132,7 +2132,7 @@
               <a:t>往上，</a:t>
             </a:r>
             <a:r>
-              <a:rPr sz="1150" b="1" lang="zh-TW" dirty="0">
+              <a:rPr sz="800" b="1" lang="zh-TW" dirty="0">
                 <a:solidFill>
                   <a:srgbClr val="000000"/>
                 </a:solidFill>
@@ -2143,7 +2143,7 @@
               <a:t>Azimuth beam width，一點二度</a:t>
             </a:r>
             <a:r>
-              <a:rPr sz="1150" lang="zh-TW" dirty="0">
+              <a:rPr sz="800" lang="zh-TW" dirty="0">
                 <a:solidFill>
                   <a:srgbClr val="000000"/>
                 </a:solidFill>
@@ -2154,7 +2154,7 @@
               <a:t>。408 是二點二度。這裡要講清楚一件事：</a:t>
             </a:r>
             <a:r>
-              <a:rPr sz="1150" b="1" lang="zh-TW" dirty="0">
+              <a:rPr sz="800" b="1" lang="zh-TW" dirty="0">
                 <a:solidFill>
                   <a:srgbClr val="000000"/>
                 </a:solidFill>
@@ -2165,7 +2165,7 @@
               <a:t>這張表上沒有「Resolution azimuth angle」這一行</a:t>
             </a:r>
             <a:r>
-              <a:rPr sz="1150" lang="zh-TW" dirty="0">
+              <a:rPr sz="800" lang="zh-TW" dirty="0">
                 <a:solidFill>
                   <a:srgbClr val="000000"/>
                 </a:solidFill>
@@ -2183,85 +2183,19 @@
                 <a:spcPts val="0"/>
               </a:spcBef>
               <a:spcAft>
-                <a:spcPts val="192"/>
+                <a:spcPts val="133"/>
               </a:spcAft>
             </a:pPr>
             <a:r>
-              <a:rPr sz="1150" lang="zh-TW" dirty="0">
-                <a:solidFill>
-                  <a:srgbClr val="000000"/>
-                </a:solidFill>
-                <a:latin typeface="Arial Unicode MS"/>
-                <a:ea typeface="Arial Unicode MS"/>
-                <a:cs typeface="Arial Unicode MS"/>
-              </a:rPr>
-              <a:t>再往上，</a:t>
-            </a:r>
-            <a:r>
-              <a:rPr sz="1150" b="1" lang="zh-TW" dirty="0">
-                <a:solidFill>
-                  <a:srgbClr val="000000"/>
-                </a:solidFill>
-                <a:latin typeface="Arial Unicode MS"/>
-                <a:ea typeface="Arial Unicode MS"/>
-                <a:cs typeface="Arial Unicode MS"/>
-              </a:rPr>
-              <a:t>Elevation angle augmentation，正負四度到正負十四度</a:t>
-            </a:r>
-            <a:r>
-              <a:rPr sz="1150" lang="zh-TW" dirty="0">
-                <a:solidFill>
-                  <a:srgbClr val="000000"/>
-                </a:solidFill>
-                <a:latin typeface="Arial Unicode MS"/>
-                <a:ea typeface="Arial Unicode MS"/>
-                <a:cs typeface="Arial Unicode MS"/>
-              </a:rPr>
-              <a:t>，而且下面有一行 </a:t>
-            </a:r>
-            <a:r>
-              <a:rPr sz="1150" b="1" lang="zh-TW" dirty="0">
-                <a:solidFill>
-                  <a:srgbClr val="000000"/>
-                </a:solidFill>
-                <a:latin typeface="Arial Unicode MS"/>
-                <a:ea typeface="Arial Unicode MS"/>
-                <a:cs typeface="Arial Unicode MS"/>
-              </a:rPr>
-              <a:t>Accuracy elevation angle，正負零點一度</a:t>
-            </a:r>
-            <a:r>
-              <a:rPr sz="1150" lang="zh-TW" dirty="0">
-                <a:solidFill>
-                  <a:srgbClr val="000000"/>
-                </a:solidFill>
-                <a:latin typeface="Arial Unicode MS"/>
-                <a:ea typeface="Arial Unicode MS"/>
-                <a:cs typeface="Arial Unicode MS"/>
-              </a:rPr>
-              <a:t>。這就是「4D」的第四個 D：距離、速度、水平角，加上</a:t>
-            </a:r>
-            <a:r>
-              <a:rPr sz="1150" b="1" lang="zh-TW" dirty="0">
-                <a:solidFill>
-                  <a:srgbClr val="000000"/>
-                </a:solidFill>
-                <a:latin typeface="Arial Unicode MS"/>
-                <a:ea typeface="Arial Unicode MS"/>
-                <a:cs typeface="Arial Unicode MS"/>
-              </a:rPr>
-              <a:t>高度</a:t>
-            </a:r>
-            <a:r>
-              <a:rPr sz="1150" lang="zh-TW" dirty="0">
-                <a:solidFill>
-                  <a:srgbClr val="000000"/>
-                </a:solidFill>
-                <a:latin typeface="Arial Unicode MS"/>
-                <a:ea typeface="Arial Unicode MS"/>
-                <a:cs typeface="Arial Unicode MS"/>
-              </a:rPr>
-              <a:t>。
+              <a:rPr sz="800" lang="zh-TW" dirty="0">
+                <a:solidFill>
+                  <a:srgbClr val="000000"/>
+                </a:solidFill>
+                <a:latin typeface="Arial Unicode MS"/>
+                <a:ea typeface="Arial Unicode MS"/>
+                <a:cs typeface="Arial Unicode MS"/>
+              </a:rPr>
+              <a:t>再往上，看講「上下」的幾行。
 </a:t>
             </a:r>
           </a:p>
@@ -2271,19 +2205,30 @@
                 <a:spcPts val="0"/>
               </a:spcBef>
               <a:spcAft>
-                <a:spcPts val="192"/>
+                <a:spcPts val="133"/>
               </a:spcAft>
             </a:pPr>
             <a:r>
-              <a:rPr sz="1150" lang="zh-TW" dirty="0">
-                <a:solidFill>
-                  <a:srgbClr val="000000"/>
-                </a:solidFill>
-                <a:latin typeface="Arial Unicode MS"/>
-                <a:ea typeface="Arial Unicode MS"/>
-                <a:cs typeface="Arial Unicode MS"/>
-              </a:rPr>
-              <a:t>第十張說 ARS 408 像只看平面地圖；多了高度，就變成立體地圖。有了高度，第十張講的那個弱點就解掉一半：一座橋和橋下停的車，一個在上面、一個在下面，它分得出來；路上掉的輪胎，它知道那是一個矮矮的東西。靜止目標要不要丟，軟體就有更多線索可以判斷。
+              <a:rPr sz="800" b="1" lang="zh-TW" dirty="0">
+                <a:solidFill>
+                  <a:srgbClr val="000000"/>
+                </a:solidFill>
+                <a:latin typeface="Arial Unicode MS"/>
+                <a:ea typeface="Arial Unicode MS"/>
+                <a:cs typeface="Arial Unicode MS"/>
+              </a:rPr>
+              <a:t>Elevation angle augmentation，垂直視野</a:t>
+            </a:r>
+            <a:r>
+              <a:rPr sz="800" lang="zh-TW" dirty="0">
+                <a:solidFill>
+                  <a:srgbClr val="000000"/>
+                </a:solidFill>
+                <a:latin typeface="Arial Unicode MS"/>
+                <a:ea typeface="Arial Unicode MS"/>
+                <a:cs typeface="Arial Unicode MS"/>
+              </a:rPr>
+              <a:t>，上下看得到多寬。它跟距離綁在一起：三百公尺外是正負四度，一百公尺內是正負十四度。換成公尺算一下：三百乘 tan 四度，大約二十一公尺；一百乘 tan 十四度，大約二十五公尺。所以不管遠近，上下都看得到二十幾公尺。遠的地方角度收窄，是把電波集中起來，才照得到三百公尺。
 </a:t>
             </a:r>
           </a:p>
@@ -2293,63 +2238,41 @@
                 <a:spcPts val="0"/>
               </a:spcBef>
               <a:spcAft>
-                <a:spcPts val="192"/>
+                <a:spcPts val="133"/>
               </a:spcAft>
             </a:pPr>
             <a:r>
-              <a:rPr sz="1150" lang="zh-TW" dirty="0">
-                <a:solidFill>
-                  <a:srgbClr val="000000"/>
-                </a:solidFill>
-                <a:latin typeface="Arial Unicode MS"/>
-                <a:ea typeface="Arial Unicode MS"/>
-                <a:cs typeface="Arial Unicode MS"/>
-              </a:rPr>
-              <a:t>代價也在表上：</a:t>
-            </a:r>
-            <a:r>
-              <a:rPr sz="1150" b="1" lang="zh-TW" dirty="0">
-                <a:solidFill>
-                  <a:srgbClr val="000000"/>
-                </a:solidFill>
-                <a:latin typeface="Arial Unicode MS"/>
-                <a:ea typeface="Arial Unicode MS"/>
-                <a:cs typeface="Arial Unicode MS"/>
-              </a:rPr>
-              <a:t>功耗十八瓦</a:t>
-            </a:r>
-            <a:r>
-              <a:rPr sz="1150" lang="zh-TW" dirty="0">
-                <a:solidFill>
-                  <a:srgbClr val="000000"/>
-                </a:solidFill>
-                <a:latin typeface="Arial Unicode MS"/>
-                <a:ea typeface="Arial Unicode MS"/>
-                <a:cs typeface="Arial Unicode MS"/>
-              </a:rPr>
-              <a:t>，408 是六點六瓦；</a:t>
-            </a:r>
-            <a:r>
-              <a:rPr sz="1150" b="1" lang="zh-TW" dirty="0">
-                <a:solidFill>
-                  <a:srgbClr val="000000"/>
-                </a:solidFill>
-                <a:latin typeface="Arial Unicode MS"/>
-                <a:ea typeface="Arial Unicode MS"/>
-                <a:cs typeface="Arial Unicode MS"/>
-              </a:rPr>
-              <a:t>五百二十六公克</a:t>
-            </a:r>
-            <a:r>
-              <a:rPr sz="1150" lang="zh-TW" dirty="0">
-                <a:solidFill>
-                  <a:srgbClr val="000000"/>
-                </a:solidFill>
-                <a:latin typeface="Arial Unicode MS"/>
-                <a:ea typeface="Arial Unicode MS"/>
-                <a:cs typeface="Arial Unicode MS"/>
-              </a:rPr>
-              <a:t>，408 是三百二十公克；介面從 CAN 變成車用乙太網路，因為資料量大很多。
+              <a:rPr sz="800" lang="zh-TW" dirty="0">
+                <a:solidFill>
+                  <a:srgbClr val="000000"/>
+                </a:solidFill>
+                <a:latin typeface="Arial Unicode MS"/>
+                <a:ea typeface="Arial Unicode MS"/>
+                <a:cs typeface="Arial Unicode MS"/>
+              </a:rPr>
+              <a:t>注意，</a:t>
+            </a:r>
+            <a:r>
+              <a:rPr sz="800" b="1" lang="zh-TW" dirty="0">
+                <a:solidFill>
+                  <a:srgbClr val="000000"/>
+                </a:solidFill>
+                <a:latin typeface="Arial Unicode MS"/>
+                <a:ea typeface="Arial Unicode MS"/>
+                <a:cs typeface="Arial Unicode MS"/>
+              </a:rPr>
+              <a:t>408 的表上也有這一行</a:t>
+            </a:r>
+            <a:r>
+              <a:rPr sz="800" lang="zh-TW" dirty="0">
+                <a:solidFill>
+                  <a:srgbClr val="000000"/>
+                </a:solidFill>
+                <a:latin typeface="Arial Unicode MS"/>
+                <a:ea typeface="Arial Unicode MS"/>
+                <a:cs typeface="Arial Unicode MS"/>
+              </a:rPr>
+              <a:t>，十四度、二十度。所以光有這一行，還不算 4D。408 是上下看得到，可是看到以後，全部壓成同一個平面回報，分不出高低。
 </a:t>
             </a:r>
           </a:p>
@@ -2359,11 +2282,275 @@
                 <a:spcPts val="0"/>
               </a:spcBef>
               <a:spcAft>
-                <a:spcPts val="192"/>
+                <a:spcPts val="133"/>
               </a:spcAft>
             </a:pPr>
             <a:r>
-              <a:rPr sz="1150" lang="zh-TW" dirty="0">
+              <a:rPr sz="800" lang="zh-TW" dirty="0">
+                <a:solidFill>
+                  <a:srgbClr val="000000"/>
+                </a:solidFill>
+                <a:latin typeface="Arial Unicode MS"/>
+                <a:ea typeface="Arial Unicode MS"/>
+                <a:cs typeface="Arial Unicode MS"/>
+              </a:rPr>
+              <a:t>差別在下面那一行：</a:t>
+            </a:r>
+            <a:r>
+              <a:rPr sz="800" b="1" lang="zh-TW" dirty="0">
+                <a:solidFill>
+                  <a:srgbClr val="000000"/>
+                </a:solidFill>
+                <a:latin typeface="Arial Unicode MS"/>
+                <a:ea typeface="Arial Unicode MS"/>
+                <a:cs typeface="Arial Unicode MS"/>
+              </a:rPr>
+              <a:t>Accuracy elevation angle，正負零點一度</a:t>
+            </a:r>
+            <a:r>
+              <a:rPr sz="800" lang="zh-TW" dirty="0">
+                <a:solidFill>
+                  <a:srgbClr val="000000"/>
+                </a:solidFill>
+                <a:latin typeface="Arial Unicode MS"/>
+                <a:ea typeface="Arial Unicode MS"/>
+                <a:cs typeface="Arial Unicode MS"/>
+              </a:rPr>
+              <a:t>。這一行的意思是：每一個目標，它都量得出</a:t>
+            </a:r>
+            <a:r>
+              <a:rPr sz="800" b="1" lang="zh-TW" dirty="0">
+                <a:solidFill>
+                  <a:srgbClr val="000000"/>
+                </a:solidFill>
+                <a:latin typeface="Arial Unicode MS"/>
+                <a:ea typeface="Arial Unicode MS"/>
+                <a:cs typeface="Arial Unicode MS"/>
+              </a:rPr>
+              <a:t>往上幾度</a:t>
+            </a:r>
+            <a:r>
+              <a:rPr sz="800" lang="zh-TW" dirty="0">
+                <a:solidFill>
+                  <a:srgbClr val="000000"/>
+                </a:solidFill>
+                <a:latin typeface="Arial Unicode MS"/>
+                <a:ea typeface="Arial Unicode MS"/>
+                <a:cs typeface="Arial Unicode MS"/>
+              </a:rPr>
+              <a:t>，而且準到零點一度。408 的表上沒有這一行。有了角度，高度就算得出來，用的還是第四週那一招：距離乘 tan 角度。一百公尺外，往上三度，大約五公尺高，像一座天橋；往上半度，不到一公尺，像路上的車或輪胎。零點一度的誤差，在一百公尺處只差十幾公分。
+</a:t>
+            </a:r>
+          </a:p>
+          <a:p>
+            <a:pPr algn="l">
+              <a:spcBef>
+                <a:spcPts val="0"/>
+              </a:spcBef>
+              <a:spcAft>
+                <a:spcPts val="133"/>
+              </a:spcAft>
+            </a:pPr>
+            <a:r>
+              <a:rPr sz="800" lang="zh-TW" dirty="0">
+                <a:solidFill>
+                  <a:srgbClr val="000000"/>
+                </a:solidFill>
+                <a:latin typeface="Arial Unicode MS"/>
+                <a:ea typeface="Arial Unicode MS"/>
+                <a:cs typeface="Arial Unicode MS"/>
+              </a:rPr>
+              <a:t>所以「4D」是每一個目標都有四個數字：</a:t>
+            </a:r>
+            <a:r>
+              <a:rPr sz="800" b="1" lang="zh-TW" dirty="0">
+                <a:solidFill>
+                  <a:srgbClr val="000000"/>
+                </a:solidFill>
+                <a:latin typeface="Arial Unicode MS"/>
+                <a:ea typeface="Arial Unicode MS"/>
+                <a:cs typeface="Arial Unicode MS"/>
+              </a:rPr>
+              <a:t>距離、速度、水平角，加上高度</a:t>
+            </a:r>
+            <a:r>
+              <a:rPr sz="800" lang="zh-TW" dirty="0">
+                <a:solidFill>
+                  <a:srgbClr val="000000"/>
+                </a:solidFill>
+                <a:latin typeface="Arial Unicode MS"/>
+                <a:ea typeface="Arial Unicode MS"/>
+                <a:cs typeface="Arial Unicode MS"/>
+              </a:rPr>
+              <a:t>。408 只有前三個。
+</a:t>
+            </a:r>
+          </a:p>
+          <a:p>
+            <a:pPr algn="l">
+              <a:spcBef>
+                <a:spcPts val="0"/>
+              </a:spcBef>
+              <a:spcAft>
+                <a:spcPts val="133"/>
+              </a:spcAft>
+            </a:pPr>
+            <a:r>
+              <a:rPr sz="800" lang="zh-TW" dirty="0">
+                <a:solidFill>
+                  <a:srgbClr val="000000"/>
+                </a:solidFill>
+                <a:latin typeface="Arial Unicode MS"/>
+                <a:ea typeface="Arial Unicode MS"/>
+                <a:cs typeface="Arial Unicode MS"/>
+              </a:rPr>
+              <a:t>第十張說 ARS 408 像只看平面地圖，只寫「前方一百公尺有東西」。548 像立體地圖，會寫「前方一百公尺、五公尺高的地方有東西」。第十張講的那個弱點就解掉一半：天橋和路上的車，一個在上面、一個在下面；路上掉的輪胎，它知道那是一個矮矮的東西。靜止目標要不要丟，軟體就有更多線索可以判斷。
+</a:t>
+            </a:r>
+          </a:p>
+          <a:p>
+            <a:pPr algn="l">
+              <a:spcBef>
+                <a:spcPts val="0"/>
+              </a:spcBef>
+              <a:spcAft>
+                <a:spcPts val="133"/>
+              </a:spcAft>
+            </a:pPr>
+            <a:r>
+              <a:rPr sz="800" lang="zh-TW" dirty="0">
+                <a:solidFill>
+                  <a:srgbClr val="000000"/>
+                </a:solidFill>
+                <a:latin typeface="Arial Unicode MS"/>
+                <a:ea typeface="Arial Unicode MS"/>
+                <a:cs typeface="Arial Unicode MS"/>
+              </a:rPr>
+              <a:t>不過跟第五張、第九張一樣，</a:t>
+            </a:r>
+            <a:r>
+              <a:rPr sz="800" b="1" lang="zh-TW" dirty="0">
+                <a:solidFill>
+                  <a:srgbClr val="000000"/>
+                </a:solidFill>
+                <a:latin typeface="Arial Unicode MS"/>
+                <a:ea typeface="Arial Unicode MS"/>
+                <a:cs typeface="Arial Unicode MS"/>
+              </a:rPr>
+              <a:t>量得準不等於分得開</a:t>
+            </a:r>
+            <a:r>
+              <a:rPr sz="800" lang="zh-TW" dirty="0">
+                <a:solidFill>
+                  <a:srgbClr val="000000"/>
+                </a:solidFill>
+                <a:latin typeface="Arial Unicode MS"/>
+                <a:ea typeface="Arial Unicode MS"/>
+                <a:cs typeface="Arial Unicode MS"/>
+              </a:rPr>
+              <a:t>。零點一度是一個東西的高度量得多準；兩個東西在同一個距離、一上一下，要分成兩個，看的是旁邊那一行 </a:t>
+            </a:r>
+            <a:r>
+              <a:rPr sz="800" b="1" lang="zh-TW" dirty="0">
+                <a:solidFill>
+                  <a:srgbClr val="000000"/>
+                </a:solidFill>
+                <a:latin typeface="Arial Unicode MS"/>
+                <a:ea typeface="Arial Unicode MS"/>
+                <a:cs typeface="Arial Unicode MS"/>
+              </a:rPr>
+              <a:t>Elevation beam width，二點三度</a:t>
+            </a:r>
+            <a:r>
+              <a:rPr sz="800" lang="zh-TW" dirty="0">
+                <a:solidFill>
+                  <a:srgbClr val="000000"/>
+                </a:solidFill>
+                <a:latin typeface="Arial Unicode MS"/>
+                <a:ea typeface="Arial Unicode MS"/>
+                <a:cs typeface="Arial Unicode MS"/>
+              </a:rPr>
+              <a:t>。一百公尺外，天橋和橋下的車上下差大約兩度多，剛好在邊上；開近到五十公尺，差到四度以上，就清楚分開了。
+</a:t>
+            </a:r>
+          </a:p>
+          <a:p>
+            <a:pPr algn="l">
+              <a:spcBef>
+                <a:spcPts val="0"/>
+              </a:spcBef>
+              <a:spcAft>
+                <a:spcPts val="133"/>
+              </a:spcAft>
+            </a:pPr>
+            <a:r>
+              <a:rPr sz="800" lang="zh-TW" dirty="0">
+                <a:solidFill>
+                  <a:srgbClr val="000000"/>
+                </a:solidFill>
+                <a:latin typeface="Arial Unicode MS"/>
+                <a:ea typeface="Arial Unicode MS"/>
+                <a:cs typeface="Arial Unicode MS"/>
+              </a:rPr>
+              <a:t>代價也在表上：</a:t>
+            </a:r>
+            <a:r>
+              <a:rPr sz="800" b="1" lang="zh-TW" dirty="0">
+                <a:solidFill>
+                  <a:srgbClr val="000000"/>
+                </a:solidFill>
+                <a:latin typeface="Arial Unicode MS"/>
+                <a:ea typeface="Arial Unicode MS"/>
+                <a:cs typeface="Arial Unicode MS"/>
+              </a:rPr>
+              <a:t>功耗十八瓦</a:t>
+            </a:r>
+            <a:r>
+              <a:rPr sz="800" lang="zh-TW" dirty="0">
+                <a:solidFill>
+                  <a:srgbClr val="000000"/>
+                </a:solidFill>
+                <a:latin typeface="Arial Unicode MS"/>
+                <a:ea typeface="Arial Unicode MS"/>
+                <a:cs typeface="Arial Unicode MS"/>
+              </a:rPr>
+              <a:t>，408 是六點六瓦；</a:t>
+            </a:r>
+            <a:r>
+              <a:rPr sz="800" b="1" lang="zh-TW" dirty="0">
+                <a:solidFill>
+                  <a:srgbClr val="000000"/>
+                </a:solidFill>
+                <a:latin typeface="Arial Unicode MS"/>
+                <a:ea typeface="Arial Unicode MS"/>
+                <a:cs typeface="Arial Unicode MS"/>
+              </a:rPr>
+              <a:t>五百二十六公克</a:t>
+            </a:r>
+            <a:r>
+              <a:rPr sz="800" lang="zh-TW" dirty="0">
+                <a:solidFill>
+                  <a:srgbClr val="000000"/>
+                </a:solidFill>
+                <a:latin typeface="Arial Unicode MS"/>
+                <a:ea typeface="Arial Unicode MS"/>
+                <a:cs typeface="Arial Unicode MS"/>
+              </a:rPr>
+              <a:t>，408 是三百二十公克；介面從 CAN 變成車用乙太網路，因為資料量大很多。
+</a:t>
+            </a:r>
+          </a:p>
+          <a:p>
+            <a:pPr algn="l">
+              <a:spcBef>
+                <a:spcPts val="0"/>
+              </a:spcBef>
+              <a:spcAft>
+                <a:spcPts val="133"/>
+              </a:spcAft>
+            </a:pPr>
+            <a:r>
+              <a:rPr sz="800" lang="zh-TW" dirty="0">
                 <a:solidFill>
                   <a:srgbClr val="000000"/>
                 </a:solidFill>

--- a/第六週(10-15)/第六週_第1節_簡報.pptx
+++ b/第六週(10-15)/第六週_第1節_簡報.pptx
@@ -611,7 +611,7 @@
                 <a:ea typeface="Arial Unicode MS"/>
                 <a:cs typeface="Arial Unicode MS"/>
               </a:rPr>
-              <a:t>今天三節的安排：第一節雷達，第二節超音波、衛星定位、IMU，第三節上機，把今天的八個型號放進五個情境，在上週那張表上再加幾列。
+              <a:t>今天三節的安排：第一節雷達，第二節超音波、衛星定位、IMU，第三節一題一題講作業：把今天的八個型號放進五個情境，在上週那張表旁邊再加四張小表。
 </a:t>
             </a:r>
           </a:p>
@@ -2558,7 +2558,7 @@
                 <a:ea typeface="Arial Unicode MS"/>
                 <a:cs typeface="Arial Unicode MS"/>
               </a:rPr>
-              <a:t>第三節上機，各位會看到這一顆五個情境全部過關。然後我會問一句：那每台車都裝它就好了？先想一下。</a:t>
+              <a:t>第三節講作業的時候，各位會看到這一顆五個情境全部過關。然後我會問一句：那每台車都裝它就好了？先想一下。</a:t>
             </a:r>
           </a:p>
         </p:txBody>
